--- a/crowd-sourced-truth-deck.pptx
+++ b/crowd-sourced-truth-deck.pptx
@@ -135,10 +135,46 @@
 <file path=ppt/revisionInfo.xml><?xml version="1.0" encoding="utf-8"?>
 <p1510:revInfo xmlns:a="http://schemas.openxmlformats.org/drawingml/2006/main" xmlns:r="http://schemas.openxmlformats.org/officeDocument/2006/relationships" xmlns:p1510="http://schemas.microsoft.com/office/powerpoint/2015/10/main">
   <p1510:revLst>
-    <p1510:client id="{1D753948-FC07-41C6-BC2D-87D4DB32FB39}" v="101" dt="2026-05-11T18:03:26.244"/>
-    <p1510:client id="{AE6416C6-3A38-45B4-910E-ED68F28C7720}" v="8" dt="2026-05-11T19:13:22.303"/>
+    <p1510:client id="{6B3F1D95-F220-4A3E-9A95-5818F1B0061C}" v="11" dt="2026-05-11T21:16:16.523"/>
   </p1510:revLst>
 </p1510:revInfo>
+</file>
+
+<file path=ppt/changesInfos/changesInfo1.xml><?xml version="1.0" encoding="utf-8"?>
+<pc:chgInfo xmlns:a="http://schemas.openxmlformats.org/drawingml/2006/main" xmlns:r="http://schemas.openxmlformats.org/officeDocument/2006/relationships" xmlns:ac="http://schemas.microsoft.com/office/drawing/2013/main/command" xmlns:pc="http://schemas.microsoft.com/office/powerpoint/2013/main/command">
+  <pc:docChgLst>
+    <pc:chgData name="John Hogue" userId="36b83df3-da7f-4749-bcb9-6943116e8a49" providerId="ADAL" clId="{231C83DC-AF7A-4A67-AF3C-1BFE3EDBF912}"/>
+    <pc:docChg chg="modSld">
+      <pc:chgData name="John Hogue" userId="36b83df3-da7f-4749-bcb9-6943116e8a49" providerId="ADAL" clId="{231C83DC-AF7A-4A67-AF3C-1BFE3EDBF912}" dt="2026-05-11T21:16:24.924" v="58" actId="1076"/>
+      <pc:docMkLst>
+        <pc:docMk/>
+      </pc:docMkLst>
+      <pc:sldChg chg="addSp modSp mod">
+        <pc:chgData name="John Hogue" userId="36b83df3-da7f-4749-bcb9-6943116e8a49" providerId="ADAL" clId="{231C83DC-AF7A-4A67-AF3C-1BFE3EDBF912}" dt="2026-05-11T21:16:24.924" v="58" actId="1076"/>
+        <pc:sldMkLst>
+          <pc:docMk/>
+          <pc:sldMk cId="0" sldId="256"/>
+        </pc:sldMkLst>
+        <pc:spChg chg="add mod">
+          <ac:chgData name="John Hogue" userId="36b83df3-da7f-4749-bcb9-6943116e8a49" providerId="ADAL" clId="{231C83DC-AF7A-4A67-AF3C-1BFE3EDBF912}" dt="2026-05-11T21:16:24.924" v="58" actId="1076"/>
+          <ac:spMkLst>
+            <pc:docMk/>
+            <pc:sldMk cId="0" sldId="256"/>
+            <ac:spMk id="4" creationId="{6E81CF7F-4BC6-EC2B-ACF6-F04854ABD372}"/>
+          </ac:spMkLst>
+        </pc:spChg>
+        <pc:picChg chg="add mod">
+          <ac:chgData name="John Hogue" userId="36b83df3-da7f-4749-bcb9-6943116e8a49" providerId="ADAL" clId="{231C83DC-AF7A-4A67-AF3C-1BFE3EDBF912}" dt="2026-05-11T21:16:16.523" v="56" actId="1076"/>
+          <ac:picMkLst>
+            <pc:docMk/>
+            <pc:sldMk cId="0" sldId="256"/>
+            <ac:picMk id="3" creationId="{E5A283E8-1439-0ACD-0220-3555311DEF48}"/>
+          </ac:picMkLst>
+        </pc:picChg>
+      </pc:sldChg>
+    </pc:docChg>
+  </pc:docChgLst>
+</pc:chgInfo>
 </file>
 
 <file path=ppt/notesMasters/notesMaster1.xml><?xml version="1.0" encoding="utf-8"?>
@@ -3252,6 +3288,96 @@
           </a:prstGeom>
         </p:spPr>
       </p:pic>
+      <p:pic>
+        <p:nvPicPr>
+          <p:cNvPr id="3" name="Picture 2" descr="QR Code Image">
+            <a:extLst>
+              <a:ext uri="{FF2B5EF4-FFF2-40B4-BE49-F238E27FC236}">
+                <a16:creationId xmlns:a16="http://schemas.microsoft.com/office/drawing/2014/main" id="{E5A283E8-1439-0ACD-0220-3555311DEF48}"/>
+              </a:ext>
+            </a:extLst>
+          </p:cNvPr>
+          <p:cNvPicPr>
+            <a:picLocks noChangeAspect="1" noChangeArrowheads="1"/>
+          </p:cNvPicPr>
+          <p:nvPr/>
+        </p:nvPicPr>
+        <p:blipFill>
+          <a:blip r:embed="rId4">
+            <a:extLst>
+              <a:ext uri="{28A0092B-C50C-407E-A947-70E740481C1C}">
+                <a14:useLocalDpi xmlns:a14="http://schemas.microsoft.com/office/drawing/2010/main" val="0"/>
+              </a:ext>
+            </a:extLst>
+          </a:blip>
+          <a:srcRect/>
+          <a:stretch>
+            <a:fillRect/>
+          </a:stretch>
+        </p:blipFill>
+        <p:spPr bwMode="auto">
+          <a:xfrm>
+            <a:off x="7799069" y="3817620"/>
+            <a:ext cx="922020" cy="922020"/>
+          </a:xfrm>
+          <a:prstGeom prst="rect">
+            <a:avLst/>
+          </a:prstGeom>
+          <a:noFill/>
+          <a:extLst>
+            <a:ext uri="{909E8E84-426E-40DD-AFC4-6F175D3DCCD1}">
+              <a14:hiddenFill xmlns:a14="http://schemas.microsoft.com/office/drawing/2010/main">
+                <a:solidFill>
+                  <a:srgbClr val="FFFFFF"/>
+                </a:solidFill>
+              </a14:hiddenFill>
+            </a:ext>
+          </a:extLst>
+        </p:spPr>
+      </p:pic>
+      <p:sp>
+        <p:nvSpPr>
+          <p:cNvPr id="4" name="Text 1">
+            <a:extLst>
+              <a:ext uri="{FF2B5EF4-FFF2-40B4-BE49-F238E27FC236}">
+                <a16:creationId xmlns:a16="http://schemas.microsoft.com/office/drawing/2014/main" id="{6E81CF7F-4BC6-EC2B-ACF6-F04854ABD372}"/>
+              </a:ext>
+            </a:extLst>
+          </p:cNvPr>
+          <p:cNvSpPr/>
+          <p:nvPr/>
+        </p:nvSpPr>
+        <p:spPr>
+          <a:xfrm>
+            <a:off x="7555229" y="4823460"/>
+            <a:ext cx="1409699" cy="238632"/>
+          </a:xfrm>
+          <a:prstGeom prst="rect">
+            <a:avLst/>
+          </a:prstGeom>
+          <a:noFill/>
+          <a:ln/>
+        </p:spPr>
+        <p:txBody>
+          <a:bodyPr wrap="square" rtlCol="0" anchor="ctr"/>
+          <a:lstStyle/>
+          <a:p>
+            <a:pPr marL="0" indent="0" algn="ctr">
+              <a:buNone/>
+            </a:pPr>
+            <a:r>
+              <a:rPr lang="en-US" sz="1000" i="1" dirty="0">
+                <a:solidFill>
+                  <a:srgbClr val="E8E8EC"/>
+                </a:solidFill>
+                <a:latin typeface="Georgia" pitchFamily="34" charset="0"/>
+              </a:rPr>
+              <a:t>Presentation + Materials</a:t>
+            </a:r>
+            <a:endParaRPr lang="en-US" sz="1000" i="1" dirty="0"/>
+          </a:p>
+        </p:txBody>
+      </p:sp>
     </p:spTree>
   </p:cSld>
   <p:clrMapOvr>

--- a/crowd-sourced-truth-deck.pptx
+++ b/crowd-sourced-truth-deck.pptx
@@ -25,8 +25,8 @@
     <p:sldId id="267" r:id="rId16"/>
     <p:sldId id="268" r:id="rId17"/>
     <p:sldId id="261" r:id="rId18"/>
-    <p:sldId id="272" r:id="rId19"/>
-    <p:sldId id="273" r:id="rId20"/>
+    <p:sldId id="273" r:id="rId19"/>
+    <p:sldId id="272" r:id="rId20"/>
     <p:sldId id="276" r:id="rId21"/>
     <p:sldId id="275" r:id="rId22"/>
   </p:sldIdLst>
@@ -135,7 +135,7 @@
 <file path=ppt/revisionInfo.xml><?xml version="1.0" encoding="utf-8"?>
 <p1510:revInfo xmlns:a="http://schemas.openxmlformats.org/drawingml/2006/main" xmlns:r="http://schemas.openxmlformats.org/officeDocument/2006/relationships" xmlns:p1510="http://schemas.microsoft.com/office/powerpoint/2015/10/main">
   <p1510:revLst>
-    <p1510:client id="{6B3F1D95-F220-4A3E-9A95-5818F1B0061C}" v="11" dt="2026-05-11T21:16:16.523"/>
+    <p1510:client id="{6B3F1D95-F220-4A3E-9A95-5818F1B0061C}" v="19" dt="2026-05-13T19:32:02.630"/>
   </p1510:revLst>
 </p1510:revInfo>
 </file>
@@ -144,13 +144,13 @@
 <pc:chgInfo xmlns:a="http://schemas.openxmlformats.org/drawingml/2006/main" xmlns:r="http://schemas.openxmlformats.org/officeDocument/2006/relationships" xmlns:ac="http://schemas.microsoft.com/office/drawing/2013/main/command" xmlns:pc="http://schemas.microsoft.com/office/powerpoint/2013/main/command">
   <pc:docChgLst>
     <pc:chgData name="John Hogue" userId="36b83df3-da7f-4749-bcb9-6943116e8a49" providerId="ADAL" clId="{231C83DC-AF7A-4A67-AF3C-1BFE3EDBF912}"/>
-    <pc:docChg chg="modSld">
-      <pc:chgData name="John Hogue" userId="36b83df3-da7f-4749-bcb9-6943116e8a49" providerId="ADAL" clId="{231C83DC-AF7A-4A67-AF3C-1BFE3EDBF912}" dt="2026-05-11T21:16:24.924" v="58" actId="1076"/>
+    <pc:docChg chg="custSel modSld sldOrd">
+      <pc:chgData name="John Hogue" userId="36b83df3-da7f-4749-bcb9-6943116e8a49" providerId="ADAL" clId="{231C83DC-AF7A-4A67-AF3C-1BFE3EDBF912}" dt="2026-05-13T23:11:15.870" v="330" actId="20577"/>
       <pc:docMkLst>
         <pc:docMk/>
       </pc:docMkLst>
       <pc:sldChg chg="addSp modSp mod">
-        <pc:chgData name="John Hogue" userId="36b83df3-da7f-4749-bcb9-6943116e8a49" providerId="ADAL" clId="{231C83DC-AF7A-4A67-AF3C-1BFE3EDBF912}" dt="2026-05-11T21:16:24.924" v="58" actId="1076"/>
+        <pc:chgData name="John Hogue" userId="36b83df3-da7f-4749-bcb9-6943116e8a49" providerId="ADAL" clId="{231C83DC-AF7A-4A67-AF3C-1BFE3EDBF912}" dt="2026-05-13T19:35:32.574" v="329" actId="207"/>
         <pc:sldMkLst>
           <pc:docMk/>
           <pc:sldMk cId="0" sldId="256"/>
@@ -163,6 +163,14 @@
             <ac:spMk id="4" creationId="{6E81CF7F-4BC6-EC2B-ACF6-F04854ABD372}"/>
           </ac:spMkLst>
         </pc:spChg>
+        <pc:spChg chg="mod ord">
+          <ac:chgData name="John Hogue" userId="36b83df3-da7f-4749-bcb9-6943116e8a49" providerId="ADAL" clId="{231C83DC-AF7A-4A67-AF3C-1BFE3EDBF912}" dt="2026-05-13T19:35:32.574" v="329" actId="207"/>
+          <ac:spMkLst>
+            <pc:docMk/>
+            <pc:sldMk cId="0" sldId="256"/>
+            <ac:spMk id="6" creationId="{00000000-0000-0000-0000-000000000000}"/>
+          </ac:spMkLst>
+        </pc:spChg>
         <pc:picChg chg="add mod">
           <ac:chgData name="John Hogue" userId="36b83df3-da7f-4749-bcb9-6943116e8a49" providerId="ADAL" clId="{231C83DC-AF7A-4A67-AF3C-1BFE3EDBF912}" dt="2026-05-11T21:16:16.523" v="56" actId="1076"/>
           <ac:picMkLst>
@@ -171,6 +179,374 @@
             <ac:picMk id="3" creationId="{E5A283E8-1439-0ACD-0220-3555311DEF48}"/>
           </ac:picMkLst>
         </pc:picChg>
+      </pc:sldChg>
+      <pc:sldChg chg="delSp mod">
+        <pc:chgData name="John Hogue" userId="36b83df3-da7f-4749-bcb9-6943116e8a49" providerId="ADAL" clId="{231C83DC-AF7A-4A67-AF3C-1BFE3EDBF912}" dt="2026-05-13T18:46:21.416" v="144" actId="478"/>
+        <pc:sldMkLst>
+          <pc:docMk/>
+          <pc:sldMk cId="0" sldId="257"/>
+        </pc:sldMkLst>
+        <pc:spChg chg="del">
+          <ac:chgData name="John Hogue" userId="36b83df3-da7f-4749-bcb9-6943116e8a49" providerId="ADAL" clId="{231C83DC-AF7A-4A67-AF3C-1BFE3EDBF912}" dt="2026-05-13T18:46:21.416" v="144" actId="478"/>
+          <ac:spMkLst>
+            <pc:docMk/>
+            <pc:sldMk cId="0" sldId="257"/>
+            <ac:spMk id="2" creationId="{00000000-0000-0000-0000-000000000000}"/>
+          </ac:spMkLst>
+        </pc:spChg>
+      </pc:sldChg>
+      <pc:sldChg chg="delSp mod">
+        <pc:chgData name="John Hogue" userId="36b83df3-da7f-4749-bcb9-6943116e8a49" providerId="ADAL" clId="{231C83DC-AF7A-4A67-AF3C-1BFE3EDBF912}" dt="2026-05-13T18:46:24.158" v="145" actId="478"/>
+        <pc:sldMkLst>
+          <pc:docMk/>
+          <pc:sldMk cId="0" sldId="258"/>
+        </pc:sldMkLst>
+        <pc:spChg chg="del">
+          <ac:chgData name="John Hogue" userId="36b83df3-da7f-4749-bcb9-6943116e8a49" providerId="ADAL" clId="{231C83DC-AF7A-4A67-AF3C-1BFE3EDBF912}" dt="2026-05-13T18:46:24.158" v="145" actId="478"/>
+          <ac:spMkLst>
+            <pc:docMk/>
+            <pc:sldMk cId="0" sldId="258"/>
+            <ac:spMk id="2" creationId="{00000000-0000-0000-0000-000000000000}"/>
+          </ac:spMkLst>
+        </pc:spChg>
+      </pc:sldChg>
+      <pc:sldChg chg="delSp mod delAnim">
+        <pc:chgData name="John Hogue" userId="36b83df3-da7f-4749-bcb9-6943116e8a49" providerId="ADAL" clId="{231C83DC-AF7A-4A67-AF3C-1BFE3EDBF912}" dt="2026-05-13T19:32:57.541" v="314" actId="478"/>
+        <pc:sldMkLst>
+          <pc:docMk/>
+          <pc:sldMk cId="0" sldId="259"/>
+        </pc:sldMkLst>
+        <pc:spChg chg="del">
+          <ac:chgData name="John Hogue" userId="36b83df3-da7f-4749-bcb9-6943116e8a49" providerId="ADAL" clId="{231C83DC-AF7A-4A67-AF3C-1BFE3EDBF912}" dt="2026-05-13T19:32:57.541" v="314" actId="478"/>
+          <ac:spMkLst>
+            <pc:docMk/>
+            <pc:sldMk cId="0" sldId="259"/>
+            <ac:spMk id="46" creationId="{00000000-0000-0000-0000-000000000000}"/>
+          </ac:spMkLst>
+        </pc:spChg>
+        <pc:spChg chg="del">
+          <ac:chgData name="John Hogue" userId="36b83df3-da7f-4749-bcb9-6943116e8a49" providerId="ADAL" clId="{231C83DC-AF7A-4A67-AF3C-1BFE3EDBF912}" dt="2026-05-13T18:46:45.345" v="152" actId="478"/>
+          <ac:spMkLst>
+            <pc:docMk/>
+            <pc:sldMk cId="0" sldId="259"/>
+            <ac:spMk id="47" creationId="{00000000-0000-0000-0000-000000000000}"/>
+          </ac:spMkLst>
+        </pc:spChg>
+      </pc:sldChg>
+      <pc:sldChg chg="delSp modSp mod">
+        <pc:chgData name="John Hogue" userId="36b83df3-da7f-4749-bcb9-6943116e8a49" providerId="ADAL" clId="{231C83DC-AF7A-4A67-AF3C-1BFE3EDBF912}" dt="2026-05-13T18:46:35.370" v="149" actId="478"/>
+        <pc:sldMkLst>
+          <pc:docMk/>
+          <pc:sldMk cId="0" sldId="260"/>
+        </pc:sldMkLst>
+        <pc:spChg chg="del mod">
+          <ac:chgData name="John Hogue" userId="36b83df3-da7f-4749-bcb9-6943116e8a49" providerId="ADAL" clId="{231C83DC-AF7A-4A67-AF3C-1BFE3EDBF912}" dt="2026-05-13T18:46:35.370" v="149" actId="478"/>
+          <ac:spMkLst>
+            <pc:docMk/>
+            <pc:sldMk cId="0" sldId="260"/>
+            <ac:spMk id="2" creationId="{00000000-0000-0000-0000-000000000000}"/>
+          </ac:spMkLst>
+        </pc:spChg>
+      </pc:sldChg>
+      <pc:sldChg chg="delSp mod modNotesTx">
+        <pc:chgData name="John Hogue" userId="36b83df3-da7f-4749-bcb9-6943116e8a49" providerId="ADAL" clId="{231C83DC-AF7A-4A67-AF3C-1BFE3EDBF912}" dt="2026-05-13T19:32:04.592" v="310" actId="20577"/>
+        <pc:sldMkLst>
+          <pc:docMk/>
+          <pc:sldMk cId="0" sldId="261"/>
+        </pc:sldMkLst>
+        <pc:spChg chg="del">
+          <ac:chgData name="John Hogue" userId="36b83df3-da7f-4749-bcb9-6943116e8a49" providerId="ADAL" clId="{231C83DC-AF7A-4A67-AF3C-1BFE3EDBF912}" dt="2026-05-13T18:47:05.483" v="158" actId="478"/>
+          <ac:spMkLst>
+            <pc:docMk/>
+            <pc:sldMk cId="0" sldId="261"/>
+            <ac:spMk id="17" creationId="{00000000-0000-0000-0000-000000000000}"/>
+          </ac:spMkLst>
+        </pc:spChg>
+      </pc:sldChg>
+      <pc:sldChg chg="delSp mod modNotesTx">
+        <pc:chgData name="John Hogue" userId="36b83df3-da7f-4749-bcb9-6943116e8a49" providerId="ADAL" clId="{231C83DC-AF7A-4A67-AF3C-1BFE3EDBF912}" dt="2026-05-13T19:32:43.190" v="313" actId="20577"/>
+        <pc:sldMkLst>
+          <pc:docMk/>
+          <pc:sldMk cId="0" sldId="265"/>
+        </pc:sldMkLst>
+        <pc:spChg chg="del">
+          <ac:chgData name="John Hogue" userId="36b83df3-da7f-4749-bcb9-6943116e8a49" providerId="ADAL" clId="{231C83DC-AF7A-4A67-AF3C-1BFE3EDBF912}" dt="2026-05-13T18:46:52.296" v="154" actId="478"/>
+          <ac:spMkLst>
+            <pc:docMk/>
+            <pc:sldMk cId="0" sldId="265"/>
+            <ac:spMk id="2" creationId="{00000000-0000-0000-0000-000000000000}"/>
+          </ac:spMkLst>
+        </pc:spChg>
+      </pc:sldChg>
+      <pc:sldChg chg="delSp mod modNotesTx">
+        <pc:chgData name="John Hogue" userId="36b83df3-da7f-4749-bcb9-6943116e8a49" providerId="ADAL" clId="{231C83DC-AF7A-4A67-AF3C-1BFE3EDBF912}" dt="2026-05-13T19:32:30.357" v="312" actId="20577"/>
+        <pc:sldMkLst>
+          <pc:docMk/>
+          <pc:sldMk cId="0" sldId="266"/>
+        </pc:sldMkLst>
+        <pc:spChg chg="del">
+          <ac:chgData name="John Hogue" userId="36b83df3-da7f-4749-bcb9-6943116e8a49" providerId="ADAL" clId="{231C83DC-AF7A-4A67-AF3C-1BFE3EDBF912}" dt="2026-05-13T18:46:56.065" v="155" actId="478"/>
+          <ac:spMkLst>
+            <pc:docMk/>
+            <pc:sldMk cId="0" sldId="266"/>
+            <ac:spMk id="2" creationId="{00000000-0000-0000-0000-000000000000}"/>
+          </ac:spMkLst>
+        </pc:spChg>
+      </pc:sldChg>
+      <pc:sldChg chg="delSp mod modNotesTx">
+        <pc:chgData name="John Hogue" userId="36b83df3-da7f-4749-bcb9-6943116e8a49" providerId="ADAL" clId="{231C83DC-AF7A-4A67-AF3C-1BFE3EDBF912}" dt="2026-05-13T23:11:15.870" v="330" actId="20577"/>
+        <pc:sldMkLst>
+          <pc:docMk/>
+          <pc:sldMk cId="0" sldId="267"/>
+        </pc:sldMkLst>
+        <pc:spChg chg="del">
+          <ac:chgData name="John Hogue" userId="36b83df3-da7f-4749-bcb9-6943116e8a49" providerId="ADAL" clId="{231C83DC-AF7A-4A67-AF3C-1BFE3EDBF912}" dt="2026-05-13T18:46:59.152" v="156" actId="478"/>
+          <ac:spMkLst>
+            <pc:docMk/>
+            <pc:sldMk cId="0" sldId="267"/>
+            <ac:spMk id="2" creationId="{00000000-0000-0000-0000-000000000000}"/>
+          </ac:spMkLst>
+        </pc:spChg>
+      </pc:sldChg>
+      <pc:sldChg chg="delSp mod modNotesTx">
+        <pc:chgData name="John Hogue" userId="36b83df3-da7f-4749-bcb9-6943116e8a49" providerId="ADAL" clId="{231C83DC-AF7A-4A67-AF3C-1BFE3EDBF912}" dt="2026-05-13T19:35:02.079" v="328" actId="20577"/>
+        <pc:sldMkLst>
+          <pc:docMk/>
+          <pc:sldMk cId="0" sldId="268"/>
+        </pc:sldMkLst>
+        <pc:spChg chg="del">
+          <ac:chgData name="John Hogue" userId="36b83df3-da7f-4749-bcb9-6943116e8a49" providerId="ADAL" clId="{231C83DC-AF7A-4A67-AF3C-1BFE3EDBF912}" dt="2026-05-13T18:47:02.168" v="157" actId="478"/>
+          <ac:spMkLst>
+            <pc:docMk/>
+            <pc:sldMk cId="0" sldId="268"/>
+            <ac:spMk id="2" creationId="{00000000-0000-0000-0000-000000000000}"/>
+          </ac:spMkLst>
+        </pc:spChg>
+      </pc:sldChg>
+      <pc:sldChg chg="addSp delSp modSp mod modNotesTx">
+        <pc:chgData name="John Hogue" userId="36b83df3-da7f-4749-bcb9-6943116e8a49" providerId="ADAL" clId="{231C83DC-AF7A-4A67-AF3C-1BFE3EDBF912}" dt="2026-05-13T18:53:42.052" v="180" actId="1035"/>
+        <pc:sldMkLst>
+          <pc:docMk/>
+          <pc:sldMk cId="0" sldId="269"/>
+        </pc:sldMkLst>
+        <pc:spChg chg="del mod">
+          <ac:chgData name="John Hogue" userId="36b83df3-da7f-4749-bcb9-6943116e8a49" providerId="ADAL" clId="{231C83DC-AF7A-4A67-AF3C-1BFE3EDBF912}" dt="2026-05-13T18:46:29.698" v="147" actId="478"/>
+          <ac:spMkLst>
+            <pc:docMk/>
+            <pc:sldMk cId="0" sldId="269"/>
+            <ac:spMk id="2" creationId="{00000000-0000-0000-0000-000000000000}"/>
+          </ac:spMkLst>
+        </pc:spChg>
+        <pc:spChg chg="mod">
+          <ac:chgData name="John Hogue" userId="36b83df3-da7f-4749-bcb9-6943116e8a49" providerId="ADAL" clId="{231C83DC-AF7A-4A67-AF3C-1BFE3EDBF912}" dt="2026-05-13T18:53:42.052" v="180" actId="1035"/>
+          <ac:spMkLst>
+            <pc:docMk/>
+            <pc:sldMk cId="0" sldId="269"/>
+            <ac:spMk id="9" creationId="{00000000-0000-0000-0000-000000000000}"/>
+          </ac:spMkLst>
+        </pc:spChg>
+        <pc:spChg chg="mod">
+          <ac:chgData name="John Hogue" userId="36b83df3-da7f-4749-bcb9-6943116e8a49" providerId="ADAL" clId="{231C83DC-AF7A-4A67-AF3C-1BFE3EDBF912}" dt="2026-05-13T18:53:42.052" v="180" actId="1035"/>
+          <ac:spMkLst>
+            <pc:docMk/>
+            <pc:sldMk cId="0" sldId="269"/>
+            <ac:spMk id="10" creationId="{00000000-0000-0000-0000-000000000000}"/>
+          </ac:spMkLst>
+        </pc:spChg>
+        <pc:spChg chg="mod">
+          <ac:chgData name="John Hogue" userId="36b83df3-da7f-4749-bcb9-6943116e8a49" providerId="ADAL" clId="{231C83DC-AF7A-4A67-AF3C-1BFE3EDBF912}" dt="2026-05-13T18:53:42.052" v="180" actId="1035"/>
+          <ac:spMkLst>
+            <pc:docMk/>
+            <pc:sldMk cId="0" sldId="269"/>
+            <ac:spMk id="11" creationId="{00000000-0000-0000-0000-000000000000}"/>
+          </ac:spMkLst>
+        </pc:spChg>
+        <pc:spChg chg="mod">
+          <ac:chgData name="John Hogue" userId="36b83df3-da7f-4749-bcb9-6943116e8a49" providerId="ADAL" clId="{231C83DC-AF7A-4A67-AF3C-1BFE3EDBF912}" dt="2026-05-13T18:53:42.052" v="180" actId="1035"/>
+          <ac:spMkLst>
+            <pc:docMk/>
+            <pc:sldMk cId="0" sldId="269"/>
+            <ac:spMk id="12" creationId="{00000000-0000-0000-0000-000000000000}"/>
+          </ac:spMkLst>
+        </pc:spChg>
+        <pc:spChg chg="mod">
+          <ac:chgData name="John Hogue" userId="36b83df3-da7f-4749-bcb9-6943116e8a49" providerId="ADAL" clId="{231C83DC-AF7A-4A67-AF3C-1BFE3EDBF912}" dt="2026-05-13T18:53:42.052" v="180" actId="1035"/>
+          <ac:spMkLst>
+            <pc:docMk/>
+            <pc:sldMk cId="0" sldId="269"/>
+            <ac:spMk id="13" creationId="{00000000-0000-0000-0000-000000000000}"/>
+          </ac:spMkLst>
+        </pc:spChg>
+        <pc:spChg chg="mod">
+          <ac:chgData name="John Hogue" userId="36b83df3-da7f-4749-bcb9-6943116e8a49" providerId="ADAL" clId="{231C83DC-AF7A-4A67-AF3C-1BFE3EDBF912}" dt="2026-05-13T18:53:42.052" v="180" actId="1035"/>
+          <ac:spMkLst>
+            <pc:docMk/>
+            <pc:sldMk cId="0" sldId="269"/>
+            <ac:spMk id="14" creationId="{00000000-0000-0000-0000-000000000000}"/>
+          </ac:spMkLst>
+        </pc:spChg>
+        <pc:spChg chg="mod">
+          <ac:chgData name="John Hogue" userId="36b83df3-da7f-4749-bcb9-6943116e8a49" providerId="ADAL" clId="{231C83DC-AF7A-4A67-AF3C-1BFE3EDBF912}" dt="2026-05-13T18:53:42.052" v="180" actId="1035"/>
+          <ac:spMkLst>
+            <pc:docMk/>
+            <pc:sldMk cId="0" sldId="269"/>
+            <ac:spMk id="15" creationId="{00000000-0000-0000-0000-000000000000}"/>
+          </ac:spMkLst>
+        </pc:spChg>
+        <pc:spChg chg="mod">
+          <ac:chgData name="John Hogue" userId="36b83df3-da7f-4749-bcb9-6943116e8a49" providerId="ADAL" clId="{231C83DC-AF7A-4A67-AF3C-1BFE3EDBF912}" dt="2026-05-13T18:53:42.052" v="180" actId="1035"/>
+          <ac:spMkLst>
+            <pc:docMk/>
+            <pc:sldMk cId="0" sldId="269"/>
+            <ac:spMk id="16" creationId="{00000000-0000-0000-0000-000000000000}"/>
+          </ac:spMkLst>
+        </pc:spChg>
+        <pc:spChg chg="mod">
+          <ac:chgData name="John Hogue" userId="36b83df3-da7f-4749-bcb9-6943116e8a49" providerId="ADAL" clId="{231C83DC-AF7A-4A67-AF3C-1BFE3EDBF912}" dt="2026-05-13T18:53:42.052" v="180" actId="1035"/>
+          <ac:spMkLst>
+            <pc:docMk/>
+            <pc:sldMk cId="0" sldId="269"/>
+            <ac:spMk id="17" creationId="{00000000-0000-0000-0000-000000000000}"/>
+          </ac:spMkLst>
+        </pc:spChg>
+        <pc:spChg chg="mod">
+          <ac:chgData name="John Hogue" userId="36b83df3-da7f-4749-bcb9-6943116e8a49" providerId="ADAL" clId="{231C83DC-AF7A-4A67-AF3C-1BFE3EDBF912}" dt="2026-05-13T18:53:42.052" v="180" actId="1035"/>
+          <ac:spMkLst>
+            <pc:docMk/>
+            <pc:sldMk cId="0" sldId="269"/>
+            <ac:spMk id="18" creationId="{00000000-0000-0000-0000-000000000000}"/>
+          </ac:spMkLst>
+        </pc:spChg>
+        <pc:spChg chg="mod">
+          <ac:chgData name="John Hogue" userId="36b83df3-da7f-4749-bcb9-6943116e8a49" providerId="ADAL" clId="{231C83DC-AF7A-4A67-AF3C-1BFE3EDBF912}" dt="2026-05-12T15:27:16.968" v="88" actId="1035"/>
+          <ac:spMkLst>
+            <pc:docMk/>
+            <pc:sldMk cId="0" sldId="269"/>
+            <ac:spMk id="20" creationId="{00000000-0000-0000-0000-000000000000}"/>
+          </ac:spMkLst>
+        </pc:spChg>
+        <pc:spChg chg="add del mod">
+          <ac:chgData name="John Hogue" userId="36b83df3-da7f-4749-bcb9-6943116e8a49" providerId="ADAL" clId="{231C83DC-AF7A-4A67-AF3C-1BFE3EDBF912}" dt="2026-05-13T18:53:31.880" v="160" actId="478"/>
+          <ac:spMkLst>
+            <pc:docMk/>
+            <pc:sldMk cId="0" sldId="269"/>
+            <ac:spMk id="21" creationId="{5A1009FF-5F40-E3DB-AB12-392F0B1AFDB1}"/>
+          </ac:spMkLst>
+        </pc:spChg>
+        <pc:spChg chg="add del mod">
+          <ac:chgData name="John Hogue" userId="36b83df3-da7f-4749-bcb9-6943116e8a49" providerId="ADAL" clId="{231C83DC-AF7A-4A67-AF3C-1BFE3EDBF912}" dt="2026-05-13T18:53:31.880" v="160" actId="478"/>
+          <ac:spMkLst>
+            <pc:docMk/>
+            <pc:sldMk cId="0" sldId="269"/>
+            <ac:spMk id="23" creationId="{F605FBCB-EDC9-A0EC-526F-627E5BC3BD34}"/>
+          </ac:spMkLst>
+        </pc:spChg>
+        <pc:spChg chg="add del mod">
+          <ac:chgData name="John Hogue" userId="36b83df3-da7f-4749-bcb9-6943116e8a49" providerId="ADAL" clId="{231C83DC-AF7A-4A67-AF3C-1BFE3EDBF912}" dt="2026-05-13T18:53:31.880" v="160" actId="478"/>
+          <ac:spMkLst>
+            <pc:docMk/>
+            <pc:sldMk cId="0" sldId="269"/>
+            <ac:spMk id="24" creationId="{42A21A0B-7941-9AD7-F27A-22B6E1A06151}"/>
+          </ac:spMkLst>
+        </pc:spChg>
+      </pc:sldChg>
+      <pc:sldChg chg="delSp mod ord modNotesTx">
+        <pc:chgData name="John Hogue" userId="36b83df3-da7f-4749-bcb9-6943116e8a49" providerId="ADAL" clId="{231C83DC-AF7A-4A67-AF3C-1BFE3EDBF912}" dt="2026-05-13T19:31:38.939" v="305" actId="20577"/>
+        <pc:sldMkLst>
+          <pc:docMk/>
+          <pc:sldMk cId="0" sldId="272"/>
+        </pc:sldMkLst>
+        <pc:spChg chg="del">
+          <ac:chgData name="John Hogue" userId="36b83df3-da7f-4749-bcb9-6943116e8a49" providerId="ADAL" clId="{231C83DC-AF7A-4A67-AF3C-1BFE3EDBF912}" dt="2026-05-13T18:47:08.603" v="159" actId="478"/>
+          <ac:spMkLst>
+            <pc:docMk/>
+            <pc:sldMk cId="0" sldId="272"/>
+            <ac:spMk id="2" creationId="{00000000-0000-0000-0000-000000000000}"/>
+          </ac:spMkLst>
+        </pc:spChg>
+      </pc:sldChg>
+      <pc:sldChg chg="addSp delSp modSp mod">
+        <pc:chgData name="John Hogue" userId="36b83df3-da7f-4749-bcb9-6943116e8a49" providerId="ADAL" clId="{231C83DC-AF7A-4A67-AF3C-1BFE3EDBF912}" dt="2026-05-13T18:46:27.110" v="146" actId="478"/>
+        <pc:sldMkLst>
+          <pc:docMk/>
+          <pc:sldMk cId="0" sldId="277"/>
+        </pc:sldMkLst>
+        <pc:spChg chg="add del mod">
+          <ac:chgData name="John Hogue" userId="36b83df3-da7f-4749-bcb9-6943116e8a49" providerId="ADAL" clId="{231C83DC-AF7A-4A67-AF3C-1BFE3EDBF912}" dt="2026-05-13T18:46:27.110" v="146" actId="478"/>
+          <ac:spMkLst>
+            <pc:docMk/>
+            <pc:sldMk cId="0" sldId="277"/>
+            <ac:spMk id="3" creationId="{1FF7EACE-88D3-B122-C767-B0B8494C6D1A}"/>
+          </ac:spMkLst>
+        </pc:spChg>
+      </pc:sldChg>
+      <pc:sldChg chg="delSp modSp mod modNotesTx">
+        <pc:chgData name="John Hogue" userId="36b83df3-da7f-4749-bcb9-6943116e8a49" providerId="ADAL" clId="{231C83DC-AF7A-4A67-AF3C-1BFE3EDBF912}" dt="2026-05-13T19:33:40.545" v="321" actId="20577"/>
+        <pc:sldMkLst>
+          <pc:docMk/>
+          <pc:sldMk cId="0" sldId="278"/>
+        </pc:sldMkLst>
+        <pc:spChg chg="del mod">
+          <ac:chgData name="John Hogue" userId="36b83df3-da7f-4749-bcb9-6943116e8a49" providerId="ADAL" clId="{231C83DC-AF7A-4A67-AF3C-1BFE3EDBF912}" dt="2026-05-13T18:46:32.686" v="148" actId="478"/>
+          <ac:spMkLst>
+            <pc:docMk/>
+            <pc:sldMk cId="0" sldId="278"/>
+            <ac:spMk id="24" creationId="{00000000-0000-0000-0000-000000000000}"/>
+          </ac:spMkLst>
+        </pc:spChg>
+      </pc:sldChg>
+      <pc:sldChg chg="delSp modSp mod delAnim">
+        <pc:chgData name="John Hogue" userId="36b83df3-da7f-4749-bcb9-6943116e8a49" providerId="ADAL" clId="{231C83DC-AF7A-4A67-AF3C-1BFE3EDBF912}" dt="2026-05-13T19:33:02.794" v="315" actId="478"/>
+        <pc:sldMkLst>
+          <pc:docMk/>
+          <pc:sldMk cId="0" sldId="279"/>
+        </pc:sldMkLst>
+        <pc:spChg chg="del">
+          <ac:chgData name="John Hogue" userId="36b83df3-da7f-4749-bcb9-6943116e8a49" providerId="ADAL" clId="{231C83DC-AF7A-4A67-AF3C-1BFE3EDBF912}" dt="2026-05-13T19:33:02.794" v="315" actId="478"/>
+          <ac:spMkLst>
+            <pc:docMk/>
+            <pc:sldMk cId="0" sldId="279"/>
+            <ac:spMk id="34" creationId="{00000000-0000-0000-0000-000000000000}"/>
+          </ac:spMkLst>
+        </pc:spChg>
+        <pc:spChg chg="del mod">
+          <ac:chgData name="John Hogue" userId="36b83df3-da7f-4749-bcb9-6943116e8a49" providerId="ADAL" clId="{231C83DC-AF7A-4A67-AF3C-1BFE3EDBF912}" dt="2026-05-13T18:46:42.309" v="151" actId="478"/>
+          <ac:spMkLst>
+            <pc:docMk/>
+            <pc:sldMk cId="0" sldId="279"/>
+            <ac:spMk id="35" creationId="{00000000-0000-0000-0000-000000000000}"/>
+          </ac:spMkLst>
+        </pc:spChg>
+      </pc:sldChg>
+      <pc:sldChg chg="delSp modSp mod">
+        <pc:chgData name="John Hogue" userId="36b83df3-da7f-4749-bcb9-6943116e8a49" providerId="ADAL" clId="{231C83DC-AF7A-4A67-AF3C-1BFE3EDBF912}" dt="2026-05-13T18:46:39.085" v="150" actId="478"/>
+        <pc:sldMkLst>
+          <pc:docMk/>
+          <pc:sldMk cId="0" sldId="280"/>
+        </pc:sldMkLst>
+        <pc:spChg chg="del mod">
+          <ac:chgData name="John Hogue" userId="36b83df3-da7f-4749-bcb9-6943116e8a49" providerId="ADAL" clId="{231C83DC-AF7A-4A67-AF3C-1BFE3EDBF912}" dt="2026-05-13T18:46:39.085" v="150" actId="478"/>
+          <ac:spMkLst>
+            <pc:docMk/>
+            <pc:sldMk cId="0" sldId="280"/>
+            <ac:spMk id="28" creationId="{00000000-0000-0000-0000-000000000000}"/>
+          </ac:spMkLst>
+        </pc:spChg>
+      </pc:sldChg>
+      <pc:sldChg chg="delSp mod">
+        <pc:chgData name="John Hogue" userId="36b83df3-da7f-4749-bcb9-6943116e8a49" providerId="ADAL" clId="{231C83DC-AF7A-4A67-AF3C-1BFE3EDBF912}" dt="2026-05-13T18:46:49.094" v="153" actId="478"/>
+        <pc:sldMkLst>
+          <pc:docMk/>
+          <pc:sldMk cId="0" sldId="281"/>
+        </pc:sldMkLst>
+        <pc:spChg chg="del">
+          <ac:chgData name="John Hogue" userId="36b83df3-da7f-4749-bcb9-6943116e8a49" providerId="ADAL" clId="{231C83DC-AF7A-4A67-AF3C-1BFE3EDBF912}" dt="2026-05-13T18:46:49.094" v="153" actId="478"/>
+          <ac:spMkLst>
+            <pc:docMk/>
+            <pc:sldMk cId="0" sldId="281"/>
+            <ac:spMk id="20" creationId="{00000000-0000-0000-0000-000000000000}"/>
+          </ac:spMkLst>
+        </pc:spChg>
       </pc:sldChg>
     </pc:docChg>
   </pc:docChgLst>
@@ -912,7 +1288,7 @@
           <a:p>
             <a:r>
               <a:rPr lang="en-US" dirty="0"/>
-              <a:t>OK, so you've protected your contributors. But where does the data actually live?</a:t>
+              <a:t>But where does the data actually live?</a:t>
             </a:r>
           </a:p>
           <a:p>
@@ -1002,7 +1378,7 @@
           <a:p>
             <a:r>
               <a:rPr lang="en-US" dirty="0"/>
-              <a:t>So now you've protected it. But protected it for whom? Who does this data actually belong to?</a:t>
+              <a:t>But protected it for whom? Who does this data actually belong to?</a:t>
             </a:r>
           </a:p>
           <a:p>
@@ -1105,7 +1481,7 @@
           <a:p>
             <a:r>
               <a:rPr lang="en-US" dirty="0"/>
-              <a:t>And eventually, every effort ends. The question is whether it ends on your terms.</a:t>
+              <a:t>Eventually, every effort ends. The question is whether it ends on your terms.</a:t>
             </a:r>
           </a:p>
           <a:p>
@@ -1195,7 +1571,26 @@
           <a:p>
             <a:r>
               <a:rPr lang="en-US" b="1" dirty="0"/>
-              <a:t>Planning your work around Speed, Safety and Resiliency matter, but there are always trade offs. </a:t>
+              <a:t>Don’t be the last person standing. </a:t>
+            </a:r>
+          </a:p>
+          <a:p>
+            <a:endParaRPr lang="en-US" b="1" dirty="0"/>
+          </a:p>
+          <a:p>
+            <a:r>
+              <a:rPr lang="en-US" dirty="0"/>
+              <a:t>The efforts that survive aren't run by heroes. They're run by people who made themselves replaceable on purpose.</a:t>
+            </a:r>
+            <a:endParaRPr lang="en-US" b="1" dirty="0"/>
+          </a:p>
+          <a:p>
+            <a:endParaRPr lang="en-US" b="1" dirty="0"/>
+          </a:p>
+          <a:p>
+            <a:r>
+              <a:rPr lang="en-US" b="1" dirty="0"/>
+              <a:t>Planning your work around Speed, Safety and Resiliency matter, but there will always be trade offs. </a:t>
             </a:r>
             <a:endParaRPr lang="en-US" dirty="0"/>
           </a:p>
@@ -1286,7 +1681,7 @@
           <a:p>
             <a:r>
               <a:rPr lang="en-US" dirty="0"/>
-              <a:t>The skills you use every day — validating data, detecting outliers, governing pipelines — those are exactly what these efforts need and almost never have.</a:t>
+              <a:t>Most of these efforts don't fail for lack of passion. They fail for lack of exactly the skills you used at work this week.</a:t>
             </a:r>
           </a:p>
           <a:p>
@@ -1314,18 +1709,16 @@
               <a:rPr lang="en-US" dirty="0"/>
               <a:t>There is no right answer. These are constraints for you to set. That's the job.</a:t>
             </a:r>
-          </a:p>
-          <a:p>
+            <a:br>
+              <a:rPr lang="en-US" dirty="0"/>
+            </a:br>
             <a:endParaRPr lang="en-US" dirty="0"/>
           </a:p>
           <a:p>
             <a:r>
               <a:rPr lang="en-US" dirty="0"/>
-              <a:t>I’ve put together a few things to help you get started.</a:t>
-            </a:r>
-          </a:p>
-          <a:p>
-            <a:endParaRPr lang="en-US" dirty="0"/>
+              <a:t>I'll leave you with one last thought.</a:t>
+            </a:r>
           </a:p>
         </p:txBody>
       </p:sp>
@@ -1468,12 +1861,6 @@
         <p:txBody>
           <a:bodyPr/>
           <a:lstStyle/>
-          <a:p>
-            <a:r>
-              <a:rPr lang="en-US" dirty="0"/>
-              <a:t>I'll leave you with one last thought.</a:t>
-            </a:r>
-          </a:p>
           <a:p>
             <a:endParaRPr lang="en-US" dirty="0"/>
           </a:p>
@@ -2402,6 +2789,16 @@
             </a:br>
             <a:r>
               <a:rPr lang="en-US" dirty="0"/>
+              <a:t>Data is not the point, people are.</a:t>
+            </a:r>
+            <a:br>
+              <a:rPr lang="en-US" dirty="0"/>
+            </a:br>
+            <a:br>
+              <a:rPr lang="en-US" dirty="0"/>
+            </a:br>
+            <a:r>
+              <a:rPr lang="en-US" dirty="0"/>
               <a:t>So you want to do it right, start with asking…</a:t>
             </a:r>
           </a:p>
@@ -2491,12 +2888,8 @@
           <a:lstStyle/>
           <a:p>
             <a:r>
-              <a:rPr lang="en-US" b="1" dirty="0"/>
-              <a:t>OK </a:t>
-            </a:r>
-            <a:r>
               <a:rPr lang="en-US" dirty="0"/>
-              <a:t>so you've decided to build. Now what question are you actually trying to answer?</a:t>
+              <a:t>You've decided to help. Now what question are you actually trying to answer?</a:t>
             </a:r>
           </a:p>
           <a:p>
@@ -3204,60 +3597,6 @@
           </a:p>
         </p:txBody>
       </p:sp>
-      <p:sp>
-        <p:nvSpPr>
-          <p:cNvPr id="6" name="Text 4"/>
-          <p:cNvSpPr/>
-          <p:nvPr/>
-        </p:nvSpPr>
-        <p:spPr>
-          <a:xfrm>
-            <a:off x="731520" y="3703320"/>
-            <a:ext cx="3657600" cy="445168"/>
-          </a:xfrm>
-          <a:prstGeom prst="rect">
-            <a:avLst/>
-          </a:prstGeom>
-          <a:noFill/>
-          <a:ln/>
-        </p:spPr>
-        <p:txBody>
-          <a:bodyPr wrap="square" rtlCol="0" anchor="ctr"/>
-          <a:lstStyle/>
-          <a:p>
-            <a:pPr marL="0" indent="0">
-              <a:buNone/>
-            </a:pPr>
-            <a:r>
-              <a:rPr lang="en-US" sz="1200" i="1" dirty="0">
-                <a:solidFill>
-                  <a:srgbClr val="8B8DA0"/>
-                </a:solidFill>
-                <a:latin typeface="Calibri" pitchFamily="34" charset="0"/>
-                <a:ea typeface="Calibri" pitchFamily="34" charset="-122"/>
-                <a:cs typeface="Calibri" pitchFamily="34" charset="-120"/>
-              </a:rPr>
-              <a:t>Author: John Hogue</a:t>
-            </a:r>
-          </a:p>
-          <a:p>
-            <a:pPr marL="0" indent="0">
-              <a:buNone/>
-            </a:pPr>
-            <a:r>
-              <a:rPr lang="en-US" sz="1200" i="1" dirty="0">
-                <a:solidFill>
-                  <a:srgbClr val="8B8DA0"/>
-                </a:solidFill>
-                <a:latin typeface="Calibri" pitchFamily="34" charset="0"/>
-                <a:ea typeface="Calibri" pitchFamily="34" charset="-122"/>
-                <a:cs typeface="Calibri" pitchFamily="34" charset="-120"/>
-              </a:rPr>
-              <a:t>Date: 2026-05-15</a:t>
-            </a:r>
-          </a:p>
-        </p:txBody>
-      </p:sp>
       <p:pic>
         <p:nvPicPr>
           <p:cNvPr id="7" name="Picture 6" descr="logo-banner.png">
@@ -3375,6 +3714,60 @@
               <a:t>Presentation + Materials</a:t>
             </a:r>
             <a:endParaRPr lang="en-US" sz="1000" i="1" dirty="0"/>
+          </a:p>
+        </p:txBody>
+      </p:sp>
+      <p:sp>
+        <p:nvSpPr>
+          <p:cNvPr id="6" name="Text 4"/>
+          <p:cNvSpPr/>
+          <p:nvPr/>
+        </p:nvSpPr>
+        <p:spPr>
+          <a:xfrm>
+            <a:off x="4110990" y="4496004"/>
+            <a:ext cx="922021" cy="445168"/>
+          </a:xfrm>
+          <a:prstGeom prst="rect">
+            <a:avLst/>
+          </a:prstGeom>
+          <a:noFill/>
+          <a:ln/>
+        </p:spPr>
+        <p:txBody>
+          <a:bodyPr wrap="square" rtlCol="0" anchor="ctr"/>
+          <a:lstStyle/>
+          <a:p>
+            <a:pPr marL="0" indent="0" algn="ctr">
+              <a:buNone/>
+            </a:pPr>
+            <a:r>
+              <a:rPr lang="en-US" sz="1200" i="1" dirty="0">
+                <a:solidFill>
+                  <a:srgbClr val="D4A843"/>
+                </a:solidFill>
+                <a:latin typeface="Calibri" pitchFamily="34" charset="0"/>
+                <a:ea typeface="Calibri" pitchFamily="34" charset="-122"/>
+                <a:cs typeface="Calibri" pitchFamily="34" charset="-120"/>
+              </a:rPr>
+              <a:t>John Hogue</a:t>
+            </a:r>
+          </a:p>
+          <a:p>
+            <a:pPr marL="0" indent="0" algn="ctr">
+              <a:buNone/>
+            </a:pPr>
+            <a:r>
+              <a:rPr lang="en-US" sz="1200" i="1" dirty="0">
+                <a:solidFill>
+                  <a:srgbClr val="D4A843"/>
+                </a:solidFill>
+                <a:latin typeface="Calibri" pitchFamily="34" charset="0"/>
+                <a:ea typeface="Calibri" pitchFamily="34" charset="-122"/>
+                <a:cs typeface="Calibri" pitchFamily="34" charset="-120"/>
+              </a:rPr>
+              <a:t>2026-05-15</a:t>
+            </a:r>
           </a:p>
         </p:txBody>
       </p:sp>
@@ -5650,127 +6043,6 @@
           </a:p>
         </p:txBody>
       </p:sp>
-      <p:sp>
-        <p:nvSpPr>
-          <p:cNvPr id="34" name="Text 32"/>
-          <p:cNvSpPr/>
-          <p:nvPr/>
-        </p:nvSpPr>
-        <p:spPr>
-          <a:xfrm>
-            <a:off x="457200" y="4800600"/>
-            <a:ext cx="8229600" cy="201168"/>
-          </a:xfrm>
-          <a:prstGeom prst="rect">
-            <a:avLst/>
-          </a:prstGeom>
-          <a:noFill/>
-          <a:ln/>
-        </p:spPr>
-        <p:txBody>
-          <a:bodyPr wrap="square" lIns="0" tIns="0" rIns="0" bIns="0" rtlCol="0" anchor="ctr"/>
-          <a:lstStyle/>
-          <a:p>
-            <a:pPr marR="0" lvl="0" algn="ctr" fontAlgn="auto">
-              <a:lnSpc>
-                <a:spcPct val="140000"/>
-              </a:lnSpc>
-              <a:spcBef>
-                <a:spcPts val="0"/>
-              </a:spcBef>
-              <a:spcAft>
-                <a:spcPts val="0"/>
-              </a:spcAft>
-              <a:buClrTx/>
-              <a:buSzTx/>
-              <a:tabLst/>
-              <a:defRPr/>
-            </a:pPr>
-            <a:r>
-              <a:rPr lang="en-US" sz="1400" b="1" i="1" dirty="0">
-                <a:solidFill>
-                  <a:srgbClr val="C94040"/>
-                </a:solidFill>
-                <a:latin typeface="Calibri" pitchFamily="34" charset="0"/>
-                <a:cs typeface="Calibri" pitchFamily="34" charset="-120"/>
-              </a:rPr>
-              <a:t>Bias in this work can endanger the people the model missed.</a:t>
-            </a:r>
-          </a:p>
-        </p:txBody>
-      </p:sp>
-      <p:sp>
-        <p:nvSpPr>
-          <p:cNvPr id="35" name="Text 33"/>
-          <p:cNvSpPr/>
-          <p:nvPr/>
-        </p:nvSpPr>
-        <p:spPr>
-          <a:xfrm>
-            <a:off x="8229600" y="4846320"/>
-            <a:ext cx="822960" cy="182880"/>
-          </a:xfrm>
-          <a:prstGeom prst="rect">
-            <a:avLst/>
-          </a:prstGeom>
-          <a:noFill/>
-          <a:ln/>
-        </p:spPr>
-        <p:txBody>
-          <a:bodyPr wrap="square" rtlCol="0" anchor="ctr"/>
-          <a:lstStyle/>
-          <a:p>
-            <a:pPr marL="0" marR="0" lvl="0" indent="0" algn="r" defTabSz="914400" rtl="0" eaLnBrk="1" fontAlgn="auto" latinLnBrk="0" hangingPunct="1">
-              <a:lnSpc>
-                <a:spcPct val="100000"/>
-              </a:lnSpc>
-              <a:spcBef>
-                <a:spcPts val="0"/>
-              </a:spcBef>
-              <a:spcAft>
-                <a:spcPts val="0"/>
-              </a:spcAft>
-              <a:buClrTx/>
-              <a:buSzTx/>
-              <a:buFontTx/>
-              <a:buNone/>
-              <a:tabLst/>
-              <a:defRPr/>
-            </a:pPr>
-            <a:r>
-              <a:rPr kumimoji="0" lang="en-US" sz="900" b="0" i="0" u="none" strike="noStrike" kern="1200" cap="none" spc="0" normalizeH="0" baseline="0" noProof="0" dirty="0">
-                <a:ln>
-                  <a:noFill/>
-                </a:ln>
-                <a:solidFill>
-                  <a:srgbClr val="8B8DA0"/>
-                </a:solidFill>
-                <a:effectLst/>
-                <a:uLnTx/>
-                <a:uFillTx/>
-                <a:latin typeface="Calibri" pitchFamily="34" charset="0"/>
-                <a:ea typeface="Calibri" pitchFamily="34" charset="-122"/>
-                <a:cs typeface="Calibri" pitchFamily="34" charset="-120"/>
-              </a:rPr>
-              <a:t>7 / 18</a:t>
-            </a:r>
-            <a:endParaRPr kumimoji="0" lang="en-US" sz="900" b="0" i="0" u="none" strike="noStrike" kern="1200" cap="none" spc="0" normalizeH="0" baseline="0" noProof="0" dirty="0">
-              <a:ln>
-                <a:noFill/>
-              </a:ln>
-              <a:solidFill>
-                <a:prstClr val="black"/>
-              </a:solidFill>
-              <a:effectLst/>
-              <a:uLnTx/>
-              <a:uFillTx/>
-              <a:latin typeface="Calibri" panose="020F0502020204030204"/>
-              <a:ea typeface="+mn-ea"/>
-              <a:cs typeface="+mn-cs"/>
-            </a:endParaRPr>
-          </a:p>
-        </p:txBody>
-      </p:sp>
       <p:pic>
         <p:nvPicPr>
           <p:cNvPr id="36" name="Image 0" descr="preencoded.png">
@@ -5806,84 +6078,6 @@
   <p:clrMapOvr>
     <a:masterClrMapping/>
   </p:clrMapOvr>
-  <p:timing>
-    <p:tnLst>
-      <p:par>
-        <p:cTn id="1" dur="indefinite" restart="never" nodeType="tmRoot">
-          <p:childTnLst>
-            <p:seq concurrent="1" nextAc="seek">
-              <p:cTn id="2" dur="indefinite" nodeType="mainSeq">
-                <p:childTnLst>
-                  <p:par>
-                    <p:cTn id="3" fill="hold">
-                      <p:stCondLst>
-                        <p:cond delay="indefinite"/>
-                      </p:stCondLst>
-                      <p:childTnLst>
-                        <p:par>
-                          <p:cTn id="4" fill="hold">
-                            <p:stCondLst>
-                              <p:cond delay="0"/>
-                            </p:stCondLst>
-                            <p:childTnLst>
-                              <p:par>
-                                <p:cTn id="5" presetID="1" presetClass="entr" presetSubtype="0" fill="hold" grpId="0" nodeType="clickEffect">
-                                  <p:stCondLst>
-                                    <p:cond delay="0"/>
-                                  </p:stCondLst>
-                                  <p:childTnLst>
-                                    <p:set>
-                                      <p:cBhvr>
-                                        <p:cTn id="6" dur="1" fill="hold">
-                                          <p:stCondLst>
-                                            <p:cond delay="0"/>
-                                          </p:stCondLst>
-                                        </p:cTn>
-                                        <p:tgtEl>
-                                          <p:spTgt spid="34"/>
-                                        </p:tgtEl>
-                                        <p:attrNameLst>
-                                          <p:attrName>style.visibility</p:attrName>
-                                        </p:attrNameLst>
-                                      </p:cBhvr>
-                                      <p:to>
-                                        <p:strVal val="visible"/>
-                                      </p:to>
-                                    </p:set>
-                                  </p:childTnLst>
-                                </p:cTn>
-                              </p:par>
-                            </p:childTnLst>
-                          </p:cTn>
-                        </p:par>
-                      </p:childTnLst>
-                    </p:cTn>
-                  </p:par>
-                </p:childTnLst>
-              </p:cTn>
-              <p:prevCondLst>
-                <p:cond evt="onPrev" delay="0">
-                  <p:tgtEl>
-                    <p:sldTgt/>
-                  </p:tgtEl>
-                </p:cond>
-              </p:prevCondLst>
-              <p:nextCondLst>
-                <p:cond evt="onNext" delay="0">
-                  <p:tgtEl>
-                    <p:sldTgt/>
-                  </p:tgtEl>
-                </p:cond>
-              </p:nextCondLst>
-            </p:seq>
-          </p:childTnLst>
-        </p:cTn>
-      </p:par>
-    </p:tnLst>
-    <p:bldLst>
-      <p:bldP spid="34" grpId="0" animBg="1"/>
-    </p:bldLst>
-  </p:timing>
 </p:sld>
 </file>
 
@@ -8825,127 +9019,6 @@
           </a:p>
         </p:txBody>
       </p:sp>
-      <p:sp>
-        <p:nvSpPr>
-          <p:cNvPr id="46" name="Text 44"/>
-          <p:cNvSpPr/>
-          <p:nvPr/>
-        </p:nvSpPr>
-        <p:spPr>
-          <a:xfrm>
-            <a:off x="457200" y="4846320"/>
-            <a:ext cx="8229600" cy="201168"/>
-          </a:xfrm>
-          <a:prstGeom prst="rect">
-            <a:avLst/>
-          </a:prstGeom>
-          <a:noFill/>
-          <a:ln/>
-        </p:spPr>
-        <p:txBody>
-          <a:bodyPr wrap="square" lIns="0" tIns="0" rIns="0" bIns="0" rtlCol="0" anchor="ctr"/>
-          <a:lstStyle/>
-          <a:p>
-            <a:pPr marR="0" lvl="0" algn="ctr" fontAlgn="auto">
-              <a:lnSpc>
-                <a:spcPct val="140000"/>
-              </a:lnSpc>
-              <a:spcBef>
-                <a:spcPts val="0"/>
-              </a:spcBef>
-              <a:spcAft>
-                <a:spcPts val="0"/>
-              </a:spcAft>
-              <a:buClrTx/>
-              <a:buSzTx/>
-              <a:tabLst/>
-              <a:defRPr/>
-            </a:pPr>
-            <a:r>
-              <a:rPr lang="en-US" sz="1400" b="1" i="1" dirty="0">
-                <a:solidFill>
-                  <a:srgbClr val="C94040"/>
-                </a:solidFill>
-                <a:latin typeface="Calibri" pitchFamily="34" charset="0"/>
-                <a:cs typeface="Calibri" pitchFamily="34" charset="-120"/>
-              </a:rPr>
-              <a:t>Treat your pipeline like a security perimeter. It is one.</a:t>
-            </a:r>
-          </a:p>
-        </p:txBody>
-      </p:sp>
-      <p:sp>
-        <p:nvSpPr>
-          <p:cNvPr id="47" name="Text 45"/>
-          <p:cNvSpPr/>
-          <p:nvPr/>
-        </p:nvSpPr>
-        <p:spPr>
-          <a:xfrm>
-            <a:off x="8229600" y="4846320"/>
-            <a:ext cx="822960" cy="182880"/>
-          </a:xfrm>
-          <a:prstGeom prst="rect">
-            <a:avLst/>
-          </a:prstGeom>
-          <a:noFill/>
-          <a:ln/>
-        </p:spPr>
-        <p:txBody>
-          <a:bodyPr wrap="square" rtlCol="0" anchor="ctr"/>
-          <a:lstStyle/>
-          <a:p>
-            <a:pPr marL="0" marR="0" lvl="0" indent="0" algn="r" defTabSz="914400" rtl="0" eaLnBrk="1" fontAlgn="auto" latinLnBrk="0" hangingPunct="1">
-              <a:lnSpc>
-                <a:spcPct val="100000"/>
-              </a:lnSpc>
-              <a:spcBef>
-                <a:spcPts val="0"/>
-              </a:spcBef>
-              <a:spcAft>
-                <a:spcPts val="0"/>
-              </a:spcAft>
-              <a:buClrTx/>
-              <a:buSzTx/>
-              <a:buFontTx/>
-              <a:buNone/>
-              <a:tabLst/>
-              <a:defRPr/>
-            </a:pPr>
-            <a:r>
-              <a:rPr kumimoji="0" lang="en-US" sz="900" b="0" i="0" u="none" strike="noStrike" kern="1200" cap="none" spc="0" normalizeH="0" baseline="0" noProof="0" dirty="0">
-                <a:ln>
-                  <a:noFill/>
-                </a:ln>
-                <a:solidFill>
-                  <a:srgbClr val="8B8DA0"/>
-                </a:solidFill>
-                <a:effectLst/>
-                <a:uLnTx/>
-                <a:uFillTx/>
-                <a:latin typeface="Calibri" pitchFamily="34" charset="0"/>
-                <a:ea typeface="Calibri" pitchFamily="34" charset="-122"/>
-                <a:cs typeface="Calibri" pitchFamily="34" charset="-120"/>
-              </a:rPr>
-              <a:t>8 / 18</a:t>
-            </a:r>
-            <a:endParaRPr kumimoji="0" lang="en-US" sz="900" b="0" i="0" u="none" strike="noStrike" kern="1200" cap="none" spc="0" normalizeH="0" baseline="0" noProof="0" dirty="0">
-              <a:ln>
-                <a:noFill/>
-              </a:ln>
-              <a:solidFill>
-                <a:prstClr val="black"/>
-              </a:solidFill>
-              <a:effectLst/>
-              <a:uLnTx/>
-              <a:uFillTx/>
-              <a:latin typeface="Calibri" panose="020F0502020204030204"/>
-              <a:ea typeface="+mn-ea"/>
-              <a:cs typeface="+mn-cs"/>
-            </a:endParaRPr>
-          </a:p>
-        </p:txBody>
-      </p:sp>
       <p:pic>
         <p:nvPicPr>
           <p:cNvPr id="48" name="Image 0" descr="preencoded.png">
@@ -8981,84 +9054,6 @@
   <p:clrMapOvr>
     <a:masterClrMapping/>
   </p:clrMapOvr>
-  <p:timing>
-    <p:tnLst>
-      <p:par>
-        <p:cTn id="1" dur="indefinite" restart="never" nodeType="tmRoot">
-          <p:childTnLst>
-            <p:seq concurrent="1" nextAc="seek">
-              <p:cTn id="2" dur="indefinite" nodeType="mainSeq">
-                <p:childTnLst>
-                  <p:par>
-                    <p:cTn id="3" fill="hold">
-                      <p:stCondLst>
-                        <p:cond delay="indefinite"/>
-                      </p:stCondLst>
-                      <p:childTnLst>
-                        <p:par>
-                          <p:cTn id="4" fill="hold">
-                            <p:stCondLst>
-                              <p:cond delay="0"/>
-                            </p:stCondLst>
-                            <p:childTnLst>
-                              <p:par>
-                                <p:cTn id="5" presetID="1" presetClass="entr" presetSubtype="0" fill="hold" grpId="0" nodeType="clickEffect">
-                                  <p:stCondLst>
-                                    <p:cond delay="0"/>
-                                  </p:stCondLst>
-                                  <p:childTnLst>
-                                    <p:set>
-                                      <p:cBhvr>
-                                        <p:cTn id="6" dur="1" fill="hold">
-                                          <p:stCondLst>
-                                            <p:cond delay="0"/>
-                                          </p:stCondLst>
-                                        </p:cTn>
-                                        <p:tgtEl>
-                                          <p:spTgt spid="46"/>
-                                        </p:tgtEl>
-                                        <p:attrNameLst>
-                                          <p:attrName>style.visibility</p:attrName>
-                                        </p:attrNameLst>
-                                      </p:cBhvr>
-                                      <p:to>
-                                        <p:strVal val="visible"/>
-                                      </p:to>
-                                    </p:set>
-                                  </p:childTnLst>
-                                </p:cTn>
-                              </p:par>
-                            </p:childTnLst>
-                          </p:cTn>
-                        </p:par>
-                      </p:childTnLst>
-                    </p:cTn>
-                  </p:par>
-                </p:childTnLst>
-              </p:cTn>
-              <p:prevCondLst>
-                <p:cond evt="onPrev" delay="0">
-                  <p:tgtEl>
-                    <p:sldTgt/>
-                  </p:tgtEl>
-                </p:cond>
-              </p:prevCondLst>
-              <p:nextCondLst>
-                <p:cond evt="onNext" delay="0">
-                  <p:tgtEl>
-                    <p:sldTgt/>
-                  </p:tgtEl>
-                </p:cond>
-              </p:nextCondLst>
-            </p:seq>
-          </p:childTnLst>
-        </p:cTn>
-      </p:par>
-    </p:tnLst>
-    <p:bldLst>
-      <p:bldP spid="46" grpId="0" animBg="1"/>
-    </p:bldLst>
-  </p:timing>
 </p:sld>
 </file>
 
@@ -10271,78 +10266,6 @@
               <a:t>.</a:t>
             </a:r>
             <a:endParaRPr kumimoji="0" lang="en-US" sz="1600" b="0" i="0" u="none" strike="noStrike" kern="1200" cap="none" spc="0" normalizeH="0" baseline="0" noProof="0" dirty="0">
-              <a:ln>
-                <a:noFill/>
-              </a:ln>
-              <a:solidFill>
-                <a:prstClr val="black"/>
-              </a:solidFill>
-              <a:effectLst/>
-              <a:uLnTx/>
-              <a:uFillTx/>
-              <a:latin typeface="Calibri" panose="020F0502020204030204"/>
-              <a:ea typeface="+mn-ea"/>
-              <a:cs typeface="+mn-cs"/>
-            </a:endParaRPr>
-          </a:p>
-        </p:txBody>
-      </p:sp>
-      <p:sp>
-        <p:nvSpPr>
-          <p:cNvPr id="20" name="Text 18"/>
-          <p:cNvSpPr/>
-          <p:nvPr/>
-        </p:nvSpPr>
-        <p:spPr>
-          <a:xfrm>
-            <a:off x="8229600" y="4846320"/>
-            <a:ext cx="822960" cy="182880"/>
-          </a:xfrm>
-          <a:prstGeom prst="rect">
-            <a:avLst/>
-          </a:prstGeom>
-          <a:noFill/>
-          <a:ln/>
-        </p:spPr>
-        <p:txBody>
-          <a:bodyPr wrap="square" rtlCol="0" anchor="ctr"/>
-          <a:lstStyle/>
-          <a:p>
-            <a:pPr marL="0" marR="0" lvl="0" indent="0" algn="r" defTabSz="914400" rtl="0" eaLnBrk="1" fontAlgn="auto" latinLnBrk="0" hangingPunct="1">
-              <a:lnSpc>
-                <a:spcPct val="100000"/>
-              </a:lnSpc>
-              <a:spcBef>
-                <a:spcPts val="0"/>
-              </a:spcBef>
-              <a:spcAft>
-                <a:spcPts val="0"/>
-              </a:spcAft>
-              <a:buClrTx/>
-              <a:buSzTx/>
-              <a:buFontTx/>
-              <a:buNone/>
-              <a:tabLst/>
-              <a:defRPr/>
-            </a:pPr>
-            <a:r>
-              <a:rPr kumimoji="0" lang="en-US" sz="900" b="0" i="0" u="none" strike="noStrike" kern="1200" cap="none" spc="0" normalizeH="0" baseline="0" noProof="0" dirty="0">
-                <a:ln>
-                  <a:noFill/>
-                </a:ln>
-                <a:solidFill>
-                  <a:srgbClr val="8B8DA0"/>
-                </a:solidFill>
-                <a:effectLst/>
-                <a:uLnTx/>
-                <a:uFillTx/>
-                <a:latin typeface="Calibri" pitchFamily="34" charset="0"/>
-                <a:ea typeface="Calibri" pitchFamily="34" charset="-122"/>
-                <a:cs typeface="Calibri" pitchFamily="34" charset="-120"/>
-              </a:rPr>
-              <a:t>9 / 18</a:t>
-            </a:r>
-            <a:endParaRPr kumimoji="0" lang="en-US" sz="900" b="0" i="0" u="none" strike="noStrike" kern="1200" cap="none" spc="0" normalizeH="0" baseline="0" noProof="0" dirty="0">
               <a:ln>
                 <a:noFill/>
               </a:ln>
@@ -10544,45 +10467,6 @@
       </p:grpSpPr>
       <p:sp>
         <p:nvSpPr>
-          <p:cNvPr id="2" name="Text 0"/>
-          <p:cNvSpPr/>
-          <p:nvPr/>
-        </p:nvSpPr>
-        <p:spPr>
-          <a:xfrm>
-            <a:off x="8046720" y="4754880"/>
-            <a:ext cx="914400" cy="274320"/>
-          </a:xfrm>
-          <a:prstGeom prst="rect">
-            <a:avLst/>
-          </a:prstGeom>
-          <a:noFill/>
-          <a:ln/>
-        </p:spPr>
-        <p:txBody>
-          <a:bodyPr wrap="square" rtlCol="0" anchor="ctr"/>
-          <a:lstStyle/>
-          <a:p>
-            <a:pPr marL="0" indent="0" algn="r">
-              <a:buNone/>
-            </a:pPr>
-            <a:r>
-              <a:rPr lang="en-US" sz="900" dirty="0">
-                <a:solidFill>
-                  <a:srgbClr val="8B8DA0"/>
-                </a:solidFill>
-                <a:latin typeface="Calibri" pitchFamily="34" charset="0"/>
-                <a:ea typeface="Calibri" pitchFamily="34" charset="-122"/>
-                <a:cs typeface="Calibri" pitchFamily="34" charset="-120"/>
-              </a:rPr>
-              <a:t>10 / 18</a:t>
-            </a:r>
-            <a:endParaRPr lang="en-US" sz="900" dirty="0"/>
-          </a:p>
-        </p:txBody>
-      </p:sp>
-      <p:sp>
-        <p:nvSpPr>
           <p:cNvPr id="3" name="Text 1"/>
           <p:cNvSpPr/>
           <p:nvPr/>
@@ -11238,45 +11122,6 @@
           </a:p>
         </p:txBody>
       </p:sp>
-      <p:sp>
-        <p:nvSpPr>
-          <p:cNvPr id="2" name="Text 0"/>
-          <p:cNvSpPr/>
-          <p:nvPr/>
-        </p:nvSpPr>
-        <p:spPr>
-          <a:xfrm>
-            <a:off x="8046720" y="4754880"/>
-            <a:ext cx="914400" cy="274320"/>
-          </a:xfrm>
-          <a:prstGeom prst="rect">
-            <a:avLst/>
-          </a:prstGeom>
-          <a:noFill/>
-          <a:ln/>
-        </p:spPr>
-        <p:txBody>
-          <a:bodyPr wrap="square" rtlCol="0" anchor="ctr"/>
-          <a:lstStyle/>
-          <a:p>
-            <a:pPr marL="0" indent="0" algn="r">
-              <a:buNone/>
-            </a:pPr>
-            <a:r>
-              <a:rPr lang="en-US" sz="900" dirty="0">
-                <a:solidFill>
-                  <a:srgbClr val="8B8DA0"/>
-                </a:solidFill>
-                <a:latin typeface="Calibri" pitchFamily="34" charset="0"/>
-                <a:ea typeface="Calibri" pitchFamily="34" charset="-122"/>
-                <a:cs typeface="Calibri" pitchFamily="34" charset="-120"/>
-              </a:rPr>
-              <a:t>11 / 18</a:t>
-            </a:r>
-            <a:endParaRPr lang="en-US" sz="900" dirty="0"/>
-          </a:p>
-        </p:txBody>
-      </p:sp>
       <p:pic>
         <p:nvPicPr>
           <p:cNvPr id="3" name="Image 0" descr="preencoded.png"/>
@@ -11821,45 +11666,6 @@
           <a:chExt cx="0" cy="0"/>
         </a:xfrm>
       </p:grpSpPr>
-      <p:sp>
-        <p:nvSpPr>
-          <p:cNvPr id="2" name="Text 0"/>
-          <p:cNvSpPr/>
-          <p:nvPr/>
-        </p:nvSpPr>
-        <p:spPr>
-          <a:xfrm>
-            <a:off x="8046720" y="4754880"/>
-            <a:ext cx="914400" cy="274320"/>
-          </a:xfrm>
-          <a:prstGeom prst="rect">
-            <a:avLst/>
-          </a:prstGeom>
-          <a:noFill/>
-          <a:ln/>
-        </p:spPr>
-        <p:txBody>
-          <a:bodyPr wrap="square" rtlCol="0" anchor="ctr"/>
-          <a:lstStyle/>
-          <a:p>
-            <a:pPr marL="0" indent="0" algn="r">
-              <a:buNone/>
-            </a:pPr>
-            <a:r>
-              <a:rPr lang="en-US" sz="900" dirty="0">
-                <a:solidFill>
-                  <a:srgbClr val="8B8DA0"/>
-                </a:solidFill>
-                <a:latin typeface="Calibri" pitchFamily="34" charset="0"/>
-                <a:ea typeface="Calibri" pitchFamily="34" charset="-122"/>
-                <a:cs typeface="Calibri" pitchFamily="34" charset="-120"/>
-              </a:rPr>
-              <a:t>12 / 18</a:t>
-            </a:r>
-            <a:endParaRPr lang="en-US" sz="900" dirty="0"/>
-          </a:p>
-        </p:txBody>
-      </p:sp>
       <p:pic>
         <p:nvPicPr>
           <p:cNvPr id="3" name="Image 0" descr="preencoded.png"/>
@@ -12766,45 +12572,6 @@
           <a:chExt cx="0" cy="0"/>
         </a:xfrm>
       </p:grpSpPr>
-      <p:sp>
-        <p:nvSpPr>
-          <p:cNvPr id="2" name="Text 0"/>
-          <p:cNvSpPr/>
-          <p:nvPr/>
-        </p:nvSpPr>
-        <p:spPr>
-          <a:xfrm>
-            <a:off x="8046720" y="4754880"/>
-            <a:ext cx="914400" cy="274320"/>
-          </a:xfrm>
-          <a:prstGeom prst="rect">
-            <a:avLst/>
-          </a:prstGeom>
-          <a:noFill/>
-          <a:ln/>
-        </p:spPr>
-        <p:txBody>
-          <a:bodyPr wrap="square" rtlCol="0" anchor="ctr"/>
-          <a:lstStyle/>
-          <a:p>
-            <a:pPr marL="0" indent="0" algn="r">
-              <a:buNone/>
-            </a:pPr>
-            <a:r>
-              <a:rPr lang="en-US" sz="900" dirty="0">
-                <a:solidFill>
-                  <a:srgbClr val="8B8DA0"/>
-                </a:solidFill>
-                <a:latin typeface="Calibri" pitchFamily="34" charset="0"/>
-                <a:ea typeface="Calibri" pitchFamily="34" charset="-122"/>
-                <a:cs typeface="Calibri" pitchFamily="34" charset="-120"/>
-              </a:rPr>
-              <a:t>13 / 18</a:t>
-            </a:r>
-            <a:endParaRPr lang="en-US" sz="900" dirty="0"/>
-          </a:p>
-        </p:txBody>
-      </p:sp>
       <p:pic>
         <p:nvPicPr>
           <p:cNvPr id="3" name="Image 0" descr="preencoded.png"/>
@@ -14534,78 +14301,6 @@
               <a:t>These constraints are yours to set. That's the job.</a:t>
             </a:r>
             <a:endParaRPr kumimoji="0" lang="en-US" sz="1600" b="0" i="0" u="none" strike="noStrike" kern="1200" cap="none" spc="0" normalizeH="0" baseline="0" noProof="0" dirty="0">
-              <a:ln>
-                <a:noFill/>
-              </a:ln>
-              <a:solidFill>
-                <a:prstClr val="black"/>
-              </a:solidFill>
-              <a:effectLst/>
-              <a:uLnTx/>
-              <a:uFillTx/>
-              <a:latin typeface="Calibri" panose="020F0502020204030204"/>
-              <a:ea typeface="+mn-ea"/>
-              <a:cs typeface="+mn-cs"/>
-            </a:endParaRPr>
-          </a:p>
-        </p:txBody>
-      </p:sp>
-      <p:sp>
-        <p:nvSpPr>
-          <p:cNvPr id="17" name="Text 15"/>
-          <p:cNvSpPr/>
-          <p:nvPr/>
-        </p:nvSpPr>
-        <p:spPr>
-          <a:xfrm>
-            <a:off x="8229600" y="4846320"/>
-            <a:ext cx="822960" cy="182880"/>
-          </a:xfrm>
-          <a:prstGeom prst="rect">
-            <a:avLst/>
-          </a:prstGeom>
-          <a:noFill/>
-          <a:ln/>
-        </p:spPr>
-        <p:txBody>
-          <a:bodyPr wrap="square" rtlCol="0" anchor="ctr"/>
-          <a:lstStyle/>
-          <a:p>
-            <a:pPr marL="0" marR="0" lvl="0" indent="0" algn="r" defTabSz="914400" rtl="0" eaLnBrk="1" fontAlgn="auto" latinLnBrk="0" hangingPunct="1">
-              <a:lnSpc>
-                <a:spcPct val="100000"/>
-              </a:lnSpc>
-              <a:spcBef>
-                <a:spcPts val="0"/>
-              </a:spcBef>
-              <a:spcAft>
-                <a:spcPts val="0"/>
-              </a:spcAft>
-              <a:buClrTx/>
-              <a:buSzTx/>
-              <a:buFontTx/>
-              <a:buNone/>
-              <a:tabLst/>
-              <a:defRPr/>
-            </a:pPr>
-            <a:r>
-              <a:rPr kumimoji="0" lang="en-US" sz="900" b="0" i="0" u="none" strike="noStrike" kern="1200" cap="none" spc="0" normalizeH="0" baseline="0" noProof="0" dirty="0">
-                <a:ln>
-                  <a:noFill/>
-                </a:ln>
-                <a:solidFill>
-                  <a:srgbClr val="8B8DA0"/>
-                </a:solidFill>
-                <a:effectLst/>
-                <a:uLnTx/>
-                <a:uFillTx/>
-                <a:latin typeface="Calibri" pitchFamily="34" charset="0"/>
-                <a:ea typeface="Calibri" pitchFamily="34" charset="-122"/>
-                <a:cs typeface="Calibri" pitchFamily="34" charset="-120"/>
-              </a:rPr>
-              <a:t>15 / 18</a:t>
-            </a:r>
-            <a:endParaRPr kumimoji="0" lang="en-US" sz="900" b="0" i="0" u="none" strike="noStrike" kern="1200" cap="none" spc="0" normalizeH="0" baseline="0" noProof="0" dirty="0">
               <a:ln>
                 <a:noFill/>
               </a:ln>
@@ -14711,6 +14406,235 @@
 
 <file path=ppt/slides/slide18.xml><?xml version="1.0" encoding="utf-8"?>
 <p:sld xmlns:a="http://schemas.openxmlformats.org/drawingml/2006/main" xmlns:r="http://schemas.openxmlformats.org/officeDocument/2006/relationships" xmlns:p="http://schemas.openxmlformats.org/presentationml/2006/main">
+  <p:cSld name="Slide 18">
+    <p:bg>
+      <p:bgPr>
+        <a:solidFill>
+          <a:srgbClr val="12121A"/>
+        </a:solidFill>
+        <a:effectLst/>
+      </p:bgPr>
+    </p:bg>
+    <p:spTree>
+      <p:nvGrpSpPr>
+        <p:cNvPr id="1" name=""/>
+        <p:cNvGrpSpPr/>
+        <p:nvPr/>
+      </p:nvGrpSpPr>
+      <p:grpSpPr>
+        <a:xfrm>
+          <a:off x="0" y="0"/>
+          <a:ext cx="0" cy="0"/>
+          <a:chOff x="0" y="0"/>
+          <a:chExt cx="0" cy="0"/>
+        </a:xfrm>
+      </p:grpSpPr>
+      <p:sp>
+        <p:nvSpPr>
+          <p:cNvPr id="2" name="Shape 0"/>
+          <p:cNvSpPr/>
+          <p:nvPr/>
+        </p:nvSpPr>
+        <p:spPr>
+          <a:xfrm>
+            <a:off x="0" y="5088636"/>
+            <a:ext cx="9144000" cy="54864"/>
+          </a:xfrm>
+          <a:prstGeom prst="rect">
+            <a:avLst/>
+          </a:prstGeom>
+          <a:solidFill>
+            <a:srgbClr val="D4A843"/>
+          </a:solidFill>
+          <a:ln/>
+        </p:spPr>
+        <p:txBody>
+          <a:bodyPr/>
+          <a:lstStyle/>
+          <a:p>
+            <a:endParaRPr lang="en-US"/>
+          </a:p>
+        </p:txBody>
+      </p:sp>
+      <p:sp>
+        <p:nvSpPr>
+          <p:cNvPr id="3" name="Text 1"/>
+          <p:cNvSpPr/>
+          <p:nvPr/>
+        </p:nvSpPr>
+        <p:spPr>
+          <a:xfrm>
+            <a:off x="731520" y="1371600"/>
+            <a:ext cx="7680960" cy="1828800"/>
+          </a:xfrm>
+          <a:prstGeom prst="rect">
+            <a:avLst/>
+          </a:prstGeom>
+          <a:noFill/>
+          <a:ln/>
+        </p:spPr>
+        <p:txBody>
+          <a:bodyPr wrap="square" rtlCol="0" anchor="ctr"/>
+          <a:lstStyle/>
+          <a:p>
+            <a:pPr marL="0" indent="0" algn="ctr">
+              <a:buNone/>
+            </a:pPr>
+            <a:r>
+              <a:rPr lang="en-US" sz="4400" i="1" dirty="0">
+                <a:solidFill>
+                  <a:srgbClr val="F0C75E"/>
+                </a:solidFill>
+                <a:latin typeface="Georgia" pitchFamily="34" charset="0"/>
+                <a:ea typeface="Georgia" pitchFamily="34" charset="-122"/>
+                <a:cs typeface="Georgia" pitchFamily="34" charset="-120"/>
+              </a:rPr>
+              <a:t>"I have friends everywhere."</a:t>
+            </a:r>
+            <a:endParaRPr lang="en-US" sz="4400" dirty="0"/>
+          </a:p>
+        </p:txBody>
+      </p:sp>
+      <p:sp>
+        <p:nvSpPr>
+          <p:cNvPr id="6" name="Text 2">
+            <a:extLst>
+              <a:ext uri="{FF2B5EF4-FFF2-40B4-BE49-F238E27FC236}">
+                <a16:creationId xmlns:a16="http://schemas.microsoft.com/office/drawing/2014/main" id="{A6E1CCCE-A1D5-77EC-FF47-A00730C81D99}"/>
+              </a:ext>
+            </a:extLst>
+          </p:cNvPr>
+          <p:cNvSpPr/>
+          <p:nvPr/>
+        </p:nvSpPr>
+        <p:spPr>
+          <a:xfrm>
+            <a:off x="731520" y="3291840"/>
+            <a:ext cx="7680960" cy="731520"/>
+          </a:xfrm>
+          <a:prstGeom prst="rect">
+            <a:avLst/>
+          </a:prstGeom>
+          <a:noFill/>
+          <a:ln/>
+        </p:spPr>
+        <p:txBody>
+          <a:bodyPr wrap="square" rtlCol="0" anchor="ctr"/>
+          <a:lstStyle/>
+          <a:p>
+            <a:pPr marL="0" indent="0" algn="ctr">
+              <a:lnSpc>
+                <a:spcPct val="130000"/>
+              </a:lnSpc>
+              <a:buNone/>
+            </a:pPr>
+            <a:r>
+              <a:rPr lang="en-US" sz="1600" b="1" i="1" dirty="0">
+                <a:solidFill>
+                  <a:schemeClr val="bg1"/>
+                </a:solidFill>
+                <a:latin typeface="Calibri" pitchFamily="34" charset="0"/>
+                <a:ea typeface="Calibri" pitchFamily="34" charset="-122"/>
+                <a:cs typeface="Calibri" pitchFamily="34" charset="-120"/>
+              </a:rPr>
+              <a:t>Perhaps with crowd sourced data, you can too.</a:t>
+            </a:r>
+            <a:endParaRPr lang="en-US" sz="1600" b="1" dirty="0">
+              <a:solidFill>
+                <a:schemeClr val="bg1"/>
+              </a:solidFill>
+            </a:endParaRPr>
+          </a:p>
+        </p:txBody>
+      </p:sp>
+      <p:sp>
+        <p:nvSpPr>
+          <p:cNvPr id="7" name="Shape 3">
+            <a:extLst>
+              <a:ext uri="{FF2B5EF4-FFF2-40B4-BE49-F238E27FC236}">
+                <a16:creationId xmlns:a16="http://schemas.microsoft.com/office/drawing/2014/main" id="{8C04F11D-C07C-49C3-A584-CDF352AA2DE0}"/>
+              </a:ext>
+            </a:extLst>
+          </p:cNvPr>
+          <p:cNvSpPr/>
+          <p:nvPr/>
+        </p:nvSpPr>
+        <p:spPr>
+          <a:xfrm>
+            <a:off x="3657600" y="4114800"/>
+            <a:ext cx="1828800" cy="18288"/>
+          </a:xfrm>
+          <a:prstGeom prst="rect">
+            <a:avLst/>
+          </a:prstGeom>
+          <a:solidFill>
+            <a:srgbClr val="D4A843"/>
+          </a:solidFill>
+          <a:ln/>
+        </p:spPr>
+        <p:txBody>
+          <a:bodyPr/>
+          <a:lstStyle/>
+          <a:p>
+            <a:endParaRPr lang="en-US"/>
+          </a:p>
+        </p:txBody>
+      </p:sp>
+      <p:sp>
+        <p:nvSpPr>
+          <p:cNvPr id="8" name="Text 4">
+            <a:extLst>
+              <a:ext uri="{FF2B5EF4-FFF2-40B4-BE49-F238E27FC236}">
+                <a16:creationId xmlns:a16="http://schemas.microsoft.com/office/drawing/2014/main" id="{A4DD42B8-2322-B2AD-8366-219D8E7AC694}"/>
+              </a:ext>
+            </a:extLst>
+          </p:cNvPr>
+          <p:cNvSpPr/>
+          <p:nvPr/>
+        </p:nvSpPr>
+        <p:spPr>
+          <a:xfrm>
+            <a:off x="2743200" y="4251960"/>
+            <a:ext cx="3657600" cy="320040"/>
+          </a:xfrm>
+          <a:prstGeom prst="rect">
+            <a:avLst/>
+          </a:prstGeom>
+          <a:noFill/>
+          <a:ln/>
+        </p:spPr>
+        <p:txBody>
+          <a:bodyPr wrap="square" rtlCol="0" anchor="ctr"/>
+          <a:lstStyle/>
+          <a:p>
+            <a:pPr marL="0" indent="0" algn="ctr">
+              <a:buNone/>
+            </a:pPr>
+            <a:r>
+              <a:rPr lang="en-US" sz="1200" i="1" dirty="0">
+                <a:solidFill>
+                  <a:srgbClr val="8B8DA0"/>
+                </a:solidFill>
+                <a:latin typeface="Calibri" pitchFamily="34" charset="0"/>
+                <a:ea typeface="Calibri" pitchFamily="34" charset="-122"/>
+                <a:cs typeface="Calibri" pitchFamily="34" charset="-120"/>
+              </a:rPr>
+              <a:t>Thank You</a:t>
+            </a:r>
+            <a:endParaRPr lang="en-US" sz="1200" dirty="0"/>
+          </a:p>
+        </p:txBody>
+      </p:sp>
+    </p:spTree>
+  </p:cSld>
+  <p:clrMapOvr>
+    <a:masterClrMapping/>
+  </p:clrMapOvr>
+</p:sld>
+</file>
+
+<file path=ppt/slides/slide19.xml><?xml version="1.0" encoding="utf-8"?>
+<p:sld xmlns:a="http://schemas.openxmlformats.org/drawingml/2006/main" xmlns:r="http://schemas.openxmlformats.org/officeDocument/2006/relationships" xmlns:p="http://schemas.openxmlformats.org/presentationml/2006/main">
   <p:cSld name="Slide 17">
     <p:bg>
       <p:bgPr>
@@ -14736,45 +14660,6 @@
       </p:grpSpPr>
       <p:sp>
         <p:nvSpPr>
-          <p:cNvPr id="2" name="Text 0"/>
-          <p:cNvSpPr/>
-          <p:nvPr/>
-        </p:nvSpPr>
-        <p:spPr>
-          <a:xfrm>
-            <a:off x="8046720" y="4754880"/>
-            <a:ext cx="914400" cy="274320"/>
-          </a:xfrm>
-          <a:prstGeom prst="rect">
-            <a:avLst/>
-          </a:prstGeom>
-          <a:noFill/>
-          <a:ln/>
-        </p:spPr>
-        <p:txBody>
-          <a:bodyPr wrap="square" rtlCol="0" anchor="ctr"/>
-          <a:lstStyle/>
-          <a:p>
-            <a:pPr marL="0" indent="0" algn="r">
-              <a:buNone/>
-            </a:pPr>
-            <a:r>
-              <a:rPr lang="en-US" sz="900" dirty="0">
-                <a:solidFill>
-                  <a:srgbClr val="8B8DA0"/>
-                </a:solidFill>
-                <a:latin typeface="Calibri" pitchFamily="34" charset="0"/>
-                <a:ea typeface="Calibri" pitchFamily="34" charset="-122"/>
-                <a:cs typeface="Calibri" pitchFamily="34" charset="-120"/>
-              </a:rPr>
-              <a:t>17 / 18</a:t>
-            </a:r>
-            <a:endParaRPr lang="en-US" sz="900" dirty="0"/>
-          </a:p>
-        </p:txBody>
-      </p:sp>
-      <p:sp>
-        <p:nvSpPr>
           <p:cNvPr id="3" name="Text 1"/>
           <p:cNvSpPr/>
           <p:nvPr/>
@@ -15506,235 +15391,6 @@
           </a:extLst>
         </p:spPr>
       </p:pic>
-    </p:spTree>
-  </p:cSld>
-  <p:clrMapOvr>
-    <a:masterClrMapping/>
-  </p:clrMapOvr>
-</p:sld>
-</file>
-
-<file path=ppt/slides/slide19.xml><?xml version="1.0" encoding="utf-8"?>
-<p:sld xmlns:a="http://schemas.openxmlformats.org/drawingml/2006/main" xmlns:r="http://schemas.openxmlformats.org/officeDocument/2006/relationships" xmlns:p="http://schemas.openxmlformats.org/presentationml/2006/main">
-  <p:cSld name="Slide 18">
-    <p:bg>
-      <p:bgPr>
-        <a:solidFill>
-          <a:srgbClr val="12121A"/>
-        </a:solidFill>
-        <a:effectLst/>
-      </p:bgPr>
-    </p:bg>
-    <p:spTree>
-      <p:nvGrpSpPr>
-        <p:cNvPr id="1" name=""/>
-        <p:cNvGrpSpPr/>
-        <p:nvPr/>
-      </p:nvGrpSpPr>
-      <p:grpSpPr>
-        <a:xfrm>
-          <a:off x="0" y="0"/>
-          <a:ext cx="0" cy="0"/>
-          <a:chOff x="0" y="0"/>
-          <a:chExt cx="0" cy="0"/>
-        </a:xfrm>
-      </p:grpSpPr>
-      <p:sp>
-        <p:nvSpPr>
-          <p:cNvPr id="2" name="Shape 0"/>
-          <p:cNvSpPr/>
-          <p:nvPr/>
-        </p:nvSpPr>
-        <p:spPr>
-          <a:xfrm>
-            <a:off x="0" y="5088636"/>
-            <a:ext cx="9144000" cy="54864"/>
-          </a:xfrm>
-          <a:prstGeom prst="rect">
-            <a:avLst/>
-          </a:prstGeom>
-          <a:solidFill>
-            <a:srgbClr val="D4A843"/>
-          </a:solidFill>
-          <a:ln/>
-        </p:spPr>
-        <p:txBody>
-          <a:bodyPr/>
-          <a:lstStyle/>
-          <a:p>
-            <a:endParaRPr lang="en-US"/>
-          </a:p>
-        </p:txBody>
-      </p:sp>
-      <p:sp>
-        <p:nvSpPr>
-          <p:cNvPr id="3" name="Text 1"/>
-          <p:cNvSpPr/>
-          <p:nvPr/>
-        </p:nvSpPr>
-        <p:spPr>
-          <a:xfrm>
-            <a:off x="731520" y="1371600"/>
-            <a:ext cx="7680960" cy="1828800"/>
-          </a:xfrm>
-          <a:prstGeom prst="rect">
-            <a:avLst/>
-          </a:prstGeom>
-          <a:noFill/>
-          <a:ln/>
-        </p:spPr>
-        <p:txBody>
-          <a:bodyPr wrap="square" rtlCol="0" anchor="ctr"/>
-          <a:lstStyle/>
-          <a:p>
-            <a:pPr marL="0" indent="0" algn="ctr">
-              <a:buNone/>
-            </a:pPr>
-            <a:r>
-              <a:rPr lang="en-US" sz="4400" i="1" dirty="0">
-                <a:solidFill>
-                  <a:srgbClr val="F0C75E"/>
-                </a:solidFill>
-                <a:latin typeface="Georgia" pitchFamily="34" charset="0"/>
-                <a:ea typeface="Georgia" pitchFamily="34" charset="-122"/>
-                <a:cs typeface="Georgia" pitchFamily="34" charset="-120"/>
-              </a:rPr>
-              <a:t>"I have friends everywhere."</a:t>
-            </a:r>
-            <a:endParaRPr lang="en-US" sz="4400" dirty="0"/>
-          </a:p>
-        </p:txBody>
-      </p:sp>
-      <p:sp>
-        <p:nvSpPr>
-          <p:cNvPr id="6" name="Text 2">
-            <a:extLst>
-              <a:ext uri="{FF2B5EF4-FFF2-40B4-BE49-F238E27FC236}">
-                <a16:creationId xmlns:a16="http://schemas.microsoft.com/office/drawing/2014/main" id="{A6E1CCCE-A1D5-77EC-FF47-A00730C81D99}"/>
-              </a:ext>
-            </a:extLst>
-          </p:cNvPr>
-          <p:cNvSpPr/>
-          <p:nvPr/>
-        </p:nvSpPr>
-        <p:spPr>
-          <a:xfrm>
-            <a:off x="731520" y="3291840"/>
-            <a:ext cx="7680960" cy="731520"/>
-          </a:xfrm>
-          <a:prstGeom prst="rect">
-            <a:avLst/>
-          </a:prstGeom>
-          <a:noFill/>
-          <a:ln/>
-        </p:spPr>
-        <p:txBody>
-          <a:bodyPr wrap="square" rtlCol="0" anchor="ctr"/>
-          <a:lstStyle/>
-          <a:p>
-            <a:pPr marL="0" indent="0" algn="ctr">
-              <a:lnSpc>
-                <a:spcPct val="130000"/>
-              </a:lnSpc>
-              <a:buNone/>
-            </a:pPr>
-            <a:r>
-              <a:rPr lang="en-US" sz="1600" b="1" i="1" dirty="0">
-                <a:solidFill>
-                  <a:schemeClr val="bg1"/>
-                </a:solidFill>
-                <a:latin typeface="Calibri" pitchFamily="34" charset="0"/>
-                <a:ea typeface="Calibri" pitchFamily="34" charset="-122"/>
-                <a:cs typeface="Calibri" pitchFamily="34" charset="-120"/>
-              </a:rPr>
-              <a:t>Perhaps with crowd sourced data, you can too.</a:t>
-            </a:r>
-            <a:endParaRPr lang="en-US" sz="1600" b="1" dirty="0">
-              <a:solidFill>
-                <a:schemeClr val="bg1"/>
-              </a:solidFill>
-            </a:endParaRPr>
-          </a:p>
-        </p:txBody>
-      </p:sp>
-      <p:sp>
-        <p:nvSpPr>
-          <p:cNvPr id="7" name="Shape 3">
-            <a:extLst>
-              <a:ext uri="{FF2B5EF4-FFF2-40B4-BE49-F238E27FC236}">
-                <a16:creationId xmlns:a16="http://schemas.microsoft.com/office/drawing/2014/main" id="{8C04F11D-C07C-49C3-A584-CDF352AA2DE0}"/>
-              </a:ext>
-            </a:extLst>
-          </p:cNvPr>
-          <p:cNvSpPr/>
-          <p:nvPr/>
-        </p:nvSpPr>
-        <p:spPr>
-          <a:xfrm>
-            <a:off x="3657600" y="4114800"/>
-            <a:ext cx="1828800" cy="18288"/>
-          </a:xfrm>
-          <a:prstGeom prst="rect">
-            <a:avLst/>
-          </a:prstGeom>
-          <a:solidFill>
-            <a:srgbClr val="D4A843"/>
-          </a:solidFill>
-          <a:ln/>
-        </p:spPr>
-        <p:txBody>
-          <a:bodyPr/>
-          <a:lstStyle/>
-          <a:p>
-            <a:endParaRPr lang="en-US"/>
-          </a:p>
-        </p:txBody>
-      </p:sp>
-      <p:sp>
-        <p:nvSpPr>
-          <p:cNvPr id="8" name="Text 4">
-            <a:extLst>
-              <a:ext uri="{FF2B5EF4-FFF2-40B4-BE49-F238E27FC236}">
-                <a16:creationId xmlns:a16="http://schemas.microsoft.com/office/drawing/2014/main" id="{A4DD42B8-2322-B2AD-8366-219D8E7AC694}"/>
-              </a:ext>
-            </a:extLst>
-          </p:cNvPr>
-          <p:cNvSpPr/>
-          <p:nvPr/>
-        </p:nvSpPr>
-        <p:spPr>
-          <a:xfrm>
-            <a:off x="2743200" y="4251960"/>
-            <a:ext cx="3657600" cy="320040"/>
-          </a:xfrm>
-          <a:prstGeom prst="rect">
-            <a:avLst/>
-          </a:prstGeom>
-          <a:noFill/>
-          <a:ln/>
-        </p:spPr>
-        <p:txBody>
-          <a:bodyPr wrap="square" rtlCol="0" anchor="ctr"/>
-          <a:lstStyle/>
-          <a:p>
-            <a:pPr marL="0" indent="0" algn="ctr">
-              <a:buNone/>
-            </a:pPr>
-            <a:r>
-              <a:rPr lang="en-US" sz="1200" i="1" dirty="0">
-                <a:solidFill>
-                  <a:srgbClr val="8B8DA0"/>
-                </a:solidFill>
-                <a:latin typeface="Calibri" pitchFamily="34" charset="0"/>
-                <a:ea typeface="Calibri" pitchFamily="34" charset="-122"/>
-                <a:cs typeface="Calibri" pitchFamily="34" charset="-120"/>
-              </a:rPr>
-              <a:t>Thank You</a:t>
-            </a:r>
-            <a:endParaRPr lang="en-US" sz="1200" dirty="0"/>
-          </a:p>
-        </p:txBody>
-      </p:sp>
     </p:spTree>
   </p:cSld>
   <p:clrMapOvr>
@@ -19541,45 +19197,6 @@
           <a:chExt cx="0" cy="0"/>
         </a:xfrm>
       </p:grpSpPr>
-      <p:sp>
-        <p:nvSpPr>
-          <p:cNvPr id="2" name="Text 0"/>
-          <p:cNvSpPr/>
-          <p:nvPr/>
-        </p:nvSpPr>
-        <p:spPr>
-          <a:xfrm>
-            <a:off x="8046720" y="4754880"/>
-            <a:ext cx="914400" cy="274320"/>
-          </a:xfrm>
-          <a:prstGeom prst="rect">
-            <a:avLst/>
-          </a:prstGeom>
-          <a:noFill/>
-          <a:ln/>
-        </p:spPr>
-        <p:txBody>
-          <a:bodyPr wrap="square" rtlCol="0" anchor="ctr"/>
-          <a:lstStyle/>
-          <a:p>
-            <a:pPr marL="0" indent="0" algn="r">
-              <a:buNone/>
-            </a:pPr>
-            <a:r>
-              <a:rPr lang="en-US" sz="900" dirty="0">
-                <a:solidFill>
-                  <a:srgbClr val="8B8DA0"/>
-                </a:solidFill>
-                <a:latin typeface="Calibri" pitchFamily="34" charset="0"/>
-                <a:ea typeface="Calibri" pitchFamily="34" charset="-122"/>
-                <a:cs typeface="Calibri" pitchFamily="34" charset="-120"/>
-              </a:rPr>
-              <a:t>2 / 18</a:t>
-            </a:r>
-            <a:endParaRPr lang="en-US" sz="900" dirty="0"/>
-          </a:p>
-        </p:txBody>
-      </p:sp>
       <p:sp>
         <p:nvSpPr>
           <p:cNvPr id="3" name="Text 1"/>
@@ -20438,45 +20055,6 @@
           <a:chExt cx="0" cy="0"/>
         </a:xfrm>
       </p:grpSpPr>
-      <p:sp>
-        <p:nvSpPr>
-          <p:cNvPr id="2" name="Text 0"/>
-          <p:cNvSpPr/>
-          <p:nvPr/>
-        </p:nvSpPr>
-        <p:spPr>
-          <a:xfrm>
-            <a:off x="8046720" y="4754880"/>
-            <a:ext cx="914400" cy="274320"/>
-          </a:xfrm>
-          <a:prstGeom prst="rect">
-            <a:avLst/>
-          </a:prstGeom>
-          <a:noFill/>
-          <a:ln/>
-        </p:spPr>
-        <p:txBody>
-          <a:bodyPr wrap="square" rtlCol="0" anchor="ctr"/>
-          <a:lstStyle/>
-          <a:p>
-            <a:pPr marL="0" indent="0" algn="r">
-              <a:buNone/>
-            </a:pPr>
-            <a:r>
-              <a:rPr lang="en-US" sz="900" dirty="0">
-                <a:solidFill>
-                  <a:srgbClr val="8B8DA0"/>
-                </a:solidFill>
-                <a:latin typeface="Calibri" pitchFamily="34" charset="0"/>
-                <a:ea typeface="Calibri" pitchFamily="34" charset="-122"/>
-                <a:cs typeface="Calibri" pitchFamily="34" charset="-120"/>
-              </a:rPr>
-              <a:t>3 / 18</a:t>
-            </a:r>
-            <a:endParaRPr lang="en-US" sz="900" dirty="0"/>
-          </a:p>
-        </p:txBody>
-      </p:sp>
       <p:sp>
         <p:nvSpPr>
           <p:cNvPr id="3" name="Text 1"/>
@@ -22708,45 +22286,6 @@
           <a:chExt cx="0" cy="0"/>
         </a:xfrm>
       </p:grpSpPr>
-      <p:sp>
-        <p:nvSpPr>
-          <p:cNvPr id="2" name="Text 0"/>
-          <p:cNvSpPr/>
-          <p:nvPr/>
-        </p:nvSpPr>
-        <p:spPr>
-          <a:xfrm>
-            <a:off x="8046720" y="4754880"/>
-            <a:ext cx="914400" cy="274320"/>
-          </a:xfrm>
-          <a:prstGeom prst="rect">
-            <a:avLst/>
-          </a:prstGeom>
-          <a:noFill/>
-          <a:ln/>
-        </p:spPr>
-        <p:txBody>
-          <a:bodyPr wrap="square" rtlCol="0" anchor="ctr"/>
-          <a:lstStyle/>
-          <a:p>
-            <a:pPr marL="0" indent="0" algn="r">
-              <a:buNone/>
-            </a:pPr>
-            <a:r>
-              <a:rPr lang="en-US" sz="900" dirty="0">
-                <a:solidFill>
-                  <a:srgbClr val="8B8DA0"/>
-                </a:solidFill>
-                <a:latin typeface="Calibri" pitchFamily="34" charset="0"/>
-                <a:ea typeface="Calibri" pitchFamily="34" charset="-122"/>
-                <a:cs typeface="Calibri" pitchFamily="34" charset="-120"/>
-              </a:rPr>
-              <a:t>14 / 18</a:t>
-            </a:r>
-            <a:endParaRPr lang="en-US" sz="900" dirty="0"/>
-          </a:p>
-        </p:txBody>
-      </p:sp>
       <p:pic>
         <p:nvPicPr>
           <p:cNvPr id="3" name="Image 0" descr="preencoded.png"/>
@@ -22845,7 +22384,7 @@
         </p:nvSpPr>
         <p:spPr>
           <a:xfrm>
-            <a:off x="731520" y="1418170"/>
+            <a:off x="731520" y="1569954"/>
             <a:ext cx="7680960" cy="658368"/>
           </a:xfrm>
           <a:prstGeom prst="rect">
@@ -22876,7 +22415,7 @@
         </p:nvSpPr>
         <p:spPr>
           <a:xfrm>
-            <a:off x="914400" y="1418170"/>
+            <a:off x="914400" y="1569954"/>
             <a:ext cx="2286000" cy="658368"/>
           </a:xfrm>
           <a:prstGeom prst="rect">
@@ -22915,7 +22454,7 @@
         </p:nvSpPr>
         <p:spPr>
           <a:xfrm>
-            <a:off x="3200400" y="1418170"/>
+            <a:off x="3200400" y="1569954"/>
             <a:ext cx="5029200" cy="658368"/>
           </a:xfrm>
           <a:prstGeom prst="rect">
@@ -22957,7 +22496,7 @@
         </p:nvSpPr>
         <p:spPr>
           <a:xfrm>
-            <a:off x="731520" y="2167978"/>
+            <a:off x="731520" y="2319762"/>
             <a:ext cx="7680960" cy="658368"/>
           </a:xfrm>
           <a:prstGeom prst="rect">
@@ -22988,7 +22527,7 @@
         </p:nvSpPr>
         <p:spPr>
           <a:xfrm>
-            <a:off x="914400" y="2167978"/>
+            <a:off x="914400" y="2319762"/>
             <a:ext cx="2286000" cy="658368"/>
           </a:xfrm>
           <a:prstGeom prst="rect">
@@ -23027,7 +22566,7 @@
         </p:nvSpPr>
         <p:spPr>
           <a:xfrm>
-            <a:off x="3200400" y="2167978"/>
+            <a:off x="3200400" y="2319762"/>
             <a:ext cx="5029200" cy="658368"/>
           </a:xfrm>
           <a:prstGeom prst="rect">
@@ -23069,7 +22608,7 @@
         </p:nvSpPr>
         <p:spPr>
           <a:xfrm>
-            <a:off x="731520" y="2917786"/>
+            <a:off x="731520" y="3069570"/>
             <a:ext cx="7680960" cy="658368"/>
           </a:xfrm>
           <a:prstGeom prst="rect">
@@ -23100,7 +22639,7 @@
         </p:nvSpPr>
         <p:spPr>
           <a:xfrm>
-            <a:off x="914400" y="2917786"/>
+            <a:off x="914400" y="3069570"/>
             <a:ext cx="2286000" cy="658368"/>
           </a:xfrm>
           <a:prstGeom prst="rect">
@@ -23139,7 +22678,7 @@
         </p:nvSpPr>
         <p:spPr>
           <a:xfrm>
-            <a:off x="3200400" y="2917786"/>
+            <a:off x="3200400" y="3069570"/>
             <a:ext cx="5029200" cy="658368"/>
           </a:xfrm>
           <a:prstGeom prst="rect">
@@ -23181,7 +22720,7 @@
         </p:nvSpPr>
         <p:spPr>
           <a:xfrm>
-            <a:off x="731520" y="3667594"/>
+            <a:off x="731520" y="3819378"/>
             <a:ext cx="7680960" cy="658368"/>
           </a:xfrm>
           <a:prstGeom prst="rect">
@@ -23212,7 +22751,7 @@
         </p:nvSpPr>
         <p:spPr>
           <a:xfrm>
-            <a:off x="914400" y="3667594"/>
+            <a:off x="914400" y="3819378"/>
             <a:ext cx="2286000" cy="658368"/>
           </a:xfrm>
           <a:prstGeom prst="rect">
@@ -23251,7 +22790,7 @@
         </p:nvSpPr>
         <p:spPr>
           <a:xfrm>
-            <a:off x="3200400" y="3667594"/>
+            <a:off x="3200400" y="3819378"/>
             <a:ext cx="5029200" cy="658368"/>
           </a:xfrm>
           <a:prstGeom prst="rect">
@@ -24938,78 +24477,6 @@
               </a:rPr>
               <a:t>Building is the last resort, not the first move.</a:t>
             </a:r>
-          </a:p>
-        </p:txBody>
-      </p:sp>
-      <p:sp>
-        <p:nvSpPr>
-          <p:cNvPr id="24" name="Text 22"/>
-          <p:cNvSpPr/>
-          <p:nvPr/>
-        </p:nvSpPr>
-        <p:spPr>
-          <a:xfrm>
-            <a:off x="8229600" y="4846320"/>
-            <a:ext cx="822960" cy="182880"/>
-          </a:xfrm>
-          <a:prstGeom prst="rect">
-            <a:avLst/>
-          </a:prstGeom>
-          <a:noFill/>
-          <a:ln/>
-        </p:spPr>
-        <p:txBody>
-          <a:bodyPr wrap="square" rtlCol="0" anchor="ctr"/>
-          <a:lstStyle/>
-          <a:p>
-            <a:pPr marL="0" marR="0" lvl="0" indent="0" algn="r" defTabSz="914400" rtl="0" eaLnBrk="1" fontAlgn="auto" latinLnBrk="0" hangingPunct="1">
-              <a:lnSpc>
-                <a:spcPct val="100000"/>
-              </a:lnSpc>
-              <a:spcBef>
-                <a:spcPts val="0"/>
-              </a:spcBef>
-              <a:spcAft>
-                <a:spcPts val="0"/>
-              </a:spcAft>
-              <a:buClrTx/>
-              <a:buSzTx/>
-              <a:buFontTx/>
-              <a:buNone/>
-              <a:tabLst/>
-              <a:defRPr/>
-            </a:pPr>
-            <a:r>
-              <a:rPr kumimoji="0" lang="en-US" sz="900" b="0" i="0" u="none" strike="noStrike" kern="1200" cap="none" spc="0" normalizeH="0" baseline="0" noProof="0" dirty="0">
-                <a:ln>
-                  <a:noFill/>
-                </a:ln>
-                <a:solidFill>
-                  <a:srgbClr val="8B8DA0"/>
-                </a:solidFill>
-                <a:effectLst/>
-                <a:uLnTx/>
-                <a:uFillTx/>
-                <a:latin typeface="Calibri" pitchFamily="34" charset="0"/>
-                <a:ea typeface="Calibri" pitchFamily="34" charset="-122"/>
-                <a:cs typeface="Calibri" pitchFamily="34" charset="-120"/>
-              </a:rPr>
-              <a:t>4 / 18</a:t>
-            </a:r>
-            <a:endParaRPr kumimoji="0" lang="en-US" sz="900" b="0" i="0" u="none" strike="noStrike" kern="1200" cap="none" spc="0" normalizeH="0" baseline="0" noProof="0" dirty="0">
-              <a:ln>
-                <a:noFill/>
-              </a:ln>
-              <a:solidFill>
-                <a:prstClr val="black"/>
-              </a:solidFill>
-              <a:effectLst/>
-              <a:uLnTx/>
-              <a:uFillTx/>
-              <a:latin typeface="Calibri" panose="020F0502020204030204"/>
-              <a:ea typeface="+mn-ea"/>
-              <a:cs typeface="+mn-cs"/>
-            </a:endParaRPr>
           </a:p>
         </p:txBody>
       </p:sp>
@@ -25154,45 +24621,6 @@
           <a:chExt cx="0" cy="0"/>
         </a:xfrm>
       </p:grpSpPr>
-      <p:sp>
-        <p:nvSpPr>
-          <p:cNvPr id="2" name="Text 0"/>
-          <p:cNvSpPr/>
-          <p:nvPr/>
-        </p:nvSpPr>
-        <p:spPr>
-          <a:xfrm>
-            <a:off x="8046720" y="4754880"/>
-            <a:ext cx="914400" cy="274320"/>
-          </a:xfrm>
-          <a:prstGeom prst="rect">
-            <a:avLst/>
-          </a:prstGeom>
-          <a:noFill/>
-          <a:ln/>
-        </p:spPr>
-        <p:txBody>
-          <a:bodyPr wrap="square" rtlCol="0" anchor="ctr"/>
-          <a:lstStyle/>
-          <a:p>
-            <a:pPr marL="0" indent="0" algn="r">
-              <a:buNone/>
-            </a:pPr>
-            <a:r>
-              <a:rPr lang="en-US" sz="900" dirty="0">
-                <a:solidFill>
-                  <a:srgbClr val="8B8DA0"/>
-                </a:solidFill>
-                <a:latin typeface="Calibri" pitchFamily="34" charset="0"/>
-                <a:ea typeface="Calibri" pitchFamily="34" charset="-122"/>
-                <a:cs typeface="Calibri" pitchFamily="34" charset="-120"/>
-              </a:rPr>
-              <a:t>5 / 18</a:t>
-            </a:r>
-            <a:endParaRPr lang="en-US" sz="900" dirty="0"/>
-          </a:p>
-        </p:txBody>
-      </p:sp>
       <p:pic>
         <p:nvPicPr>
           <p:cNvPr id="3" name="Image 0" descr="preencoded.png"/>
@@ -27083,78 +26511,6 @@
               </a:rPr>
               <a:t>The right model depends on the consequence of being wrong</a:t>
             </a:r>
-          </a:p>
-        </p:txBody>
-      </p:sp>
-      <p:sp>
-        <p:nvSpPr>
-          <p:cNvPr id="28" name="Text 26"/>
-          <p:cNvSpPr/>
-          <p:nvPr/>
-        </p:nvSpPr>
-        <p:spPr>
-          <a:xfrm>
-            <a:off x="8229600" y="4846320"/>
-            <a:ext cx="822960" cy="182880"/>
-          </a:xfrm>
-          <a:prstGeom prst="rect">
-            <a:avLst/>
-          </a:prstGeom>
-          <a:noFill/>
-          <a:ln/>
-        </p:spPr>
-        <p:txBody>
-          <a:bodyPr wrap="square" rtlCol="0" anchor="ctr"/>
-          <a:lstStyle/>
-          <a:p>
-            <a:pPr marL="0" marR="0" lvl="0" indent="0" algn="r" defTabSz="914400" rtl="0" eaLnBrk="1" fontAlgn="auto" latinLnBrk="0" hangingPunct="1">
-              <a:lnSpc>
-                <a:spcPct val="100000"/>
-              </a:lnSpc>
-              <a:spcBef>
-                <a:spcPts val="0"/>
-              </a:spcBef>
-              <a:spcAft>
-                <a:spcPts val="0"/>
-              </a:spcAft>
-              <a:buClrTx/>
-              <a:buSzTx/>
-              <a:buFontTx/>
-              <a:buNone/>
-              <a:tabLst/>
-              <a:defRPr/>
-            </a:pPr>
-            <a:r>
-              <a:rPr kumimoji="0" lang="en-US" sz="900" b="0" i="0" u="none" strike="noStrike" kern="1200" cap="none" spc="0" normalizeH="0" baseline="0" noProof="0" dirty="0">
-                <a:ln>
-                  <a:noFill/>
-                </a:ln>
-                <a:solidFill>
-                  <a:srgbClr val="8B8DA0"/>
-                </a:solidFill>
-                <a:effectLst/>
-                <a:uLnTx/>
-                <a:uFillTx/>
-                <a:latin typeface="Calibri" pitchFamily="34" charset="0"/>
-                <a:ea typeface="Calibri" pitchFamily="34" charset="-122"/>
-                <a:cs typeface="Calibri" pitchFamily="34" charset="-120"/>
-              </a:rPr>
-              <a:t>6 / 18</a:t>
-            </a:r>
-            <a:endParaRPr kumimoji="0" lang="en-US" sz="900" b="0" i="0" u="none" strike="noStrike" kern="1200" cap="none" spc="0" normalizeH="0" baseline="0" noProof="0" dirty="0">
-              <a:ln>
-                <a:noFill/>
-              </a:ln>
-              <a:solidFill>
-                <a:prstClr val="black"/>
-              </a:solidFill>
-              <a:effectLst/>
-              <a:uLnTx/>
-              <a:uFillTx/>
-              <a:latin typeface="Calibri" panose="020F0502020204030204"/>
-              <a:ea typeface="+mn-ea"/>
-              <a:cs typeface="+mn-cs"/>
-            </a:endParaRPr>
           </a:p>
         </p:txBody>
       </p:sp>
